--- a/Matematica Discreta/Slides/01 - Fundamentos.pptx
+++ b/Matematica Discreta/Slides/01 - Fundamentos.pptx
@@ -6,7 +6,7 @@
     <p:sldMasterId id="2147483684" r:id="rId2"/>
   </p:sldMasterIdLst>
   <p:notesMasterIdLst>
-    <p:notesMasterId r:id="rId11"/>
+    <p:notesMasterId r:id="rId16"/>
   </p:notesMasterIdLst>
   <p:sldIdLst>
     <p:sldId id="256" r:id="rId3"/>
@@ -17,6 +17,11 @@
     <p:sldId id="293" r:id="rId8"/>
     <p:sldId id="291" r:id="rId9"/>
     <p:sldId id="292" r:id="rId10"/>
+    <p:sldId id="294" r:id="rId11"/>
+    <p:sldId id="295" r:id="rId12"/>
+    <p:sldId id="296" r:id="rId13"/>
+    <p:sldId id="298" r:id="rId14"/>
+    <p:sldId id="299" r:id="rId15"/>
   </p:sldIdLst>
   <p:sldSz cx="12192000" cy="6858000"/>
   <p:notesSz cx="6858000" cy="9144000"/>
@@ -205,7 +210,7 @@
           <a:p>
             <a:fld id="{6ED03497-8374-466E-85FA-95E1138D8F6E}" type="datetimeFigureOut">
               <a:rPr lang="pt-BR" smtClean="0"/>
-              <a:t>22/08/2026</a:t>
+              <a:t>17/10/2026</a:t>
             </a:fld>
             <a:endParaRPr lang="pt-BR"/>
           </a:p>
@@ -563,6 +568,622 @@
 </p:notes>
 </file>
 
+<file path=ppt/notesSlides/notesSlide10.xml><?xml version="1.0" encoding="utf-8"?>
+<p:notes xmlns:a="http://schemas.openxmlformats.org/drawingml/2006/main" xmlns:r="http://schemas.openxmlformats.org/officeDocument/2006/relationships" xmlns:p="http://schemas.openxmlformats.org/presentationml/2006/main">
+  <p:cSld>
+    <p:spTree>
+      <p:nvGrpSpPr>
+        <p:cNvPr id="1" name="">
+          <a:extLst>
+            <a:ext uri="{FF2B5EF4-FFF2-40B4-BE49-F238E27FC236}">
+              <a16:creationId xmlns:a16="http://schemas.microsoft.com/office/drawing/2014/main" id="{4B8BBEE2-F314-6EE9-4B29-055318B840DE}"/>
+            </a:ext>
+          </a:extLst>
+        </p:cNvPr>
+        <p:cNvGrpSpPr/>
+        <p:nvPr/>
+      </p:nvGrpSpPr>
+      <p:grpSpPr>
+        <a:xfrm>
+          <a:off x="0" y="0"/>
+          <a:ext cx="0" cy="0"/>
+          <a:chOff x="0" y="0"/>
+          <a:chExt cx="0" cy="0"/>
+        </a:xfrm>
+      </p:grpSpPr>
+      <p:sp>
+        <p:nvSpPr>
+          <p:cNvPr id="2" name="Espaço Reservado para Imagem de Slide 1">
+            <a:extLst>
+              <a:ext uri="{FF2B5EF4-FFF2-40B4-BE49-F238E27FC236}">
+                <a16:creationId xmlns:a16="http://schemas.microsoft.com/office/drawing/2014/main" id="{E22F9A89-3D12-7300-3A4F-44CA7488568E}"/>
+              </a:ext>
+            </a:extLst>
+          </p:cNvPr>
+          <p:cNvSpPr>
+            <a:spLocks noGrp="1" noRot="1" noChangeAspect="1"/>
+          </p:cNvSpPr>
+          <p:nvPr>
+            <p:ph type="sldImg"/>
+          </p:nvPr>
+        </p:nvSpPr>
+        <p:spPr/>
+        <p:txBody>
+          <a:bodyPr/>
+          <a:lstStyle/>
+          <a:p>
+            <a:endParaRPr lang="pt-BR"/>
+          </a:p>
+        </p:txBody>
+      </p:sp>
+      <p:sp>
+        <p:nvSpPr>
+          <p:cNvPr id="3" name="Espaço Reservado para Anotações 2">
+            <a:extLst>
+              <a:ext uri="{FF2B5EF4-FFF2-40B4-BE49-F238E27FC236}">
+                <a16:creationId xmlns:a16="http://schemas.microsoft.com/office/drawing/2014/main" id="{9088BD79-B487-64C3-1A58-66298F95884C}"/>
+              </a:ext>
+            </a:extLst>
+          </p:cNvPr>
+          <p:cNvSpPr>
+            <a:spLocks noGrp="1"/>
+          </p:cNvSpPr>
+          <p:nvPr>
+            <p:ph type="body" idx="1"/>
+          </p:nvPr>
+        </p:nvSpPr>
+        <p:spPr/>
+        <p:txBody>
+          <a:bodyPr/>
+          <a:lstStyle/>
+          <a:p>
+            <a:pPr marL="0" indent="0">
+              <a:buFontTx/>
+              <a:buNone/>
+            </a:pPr>
+            <a:r>
+              <a:rPr lang="pt-BR" b="1" dirty="0"/>
+              <a:t>Sim e Não também são valores discretos</a:t>
+            </a:r>
+          </a:p>
+          <a:p>
+            <a:pPr marL="171450" indent="-171450">
+              <a:buFont typeface="Arial" panose="020B0604020202020204" pitchFamily="34" charset="0"/>
+              <a:buChar char="•"/>
+            </a:pPr>
+            <a:endParaRPr lang="pt-BR" b="1" dirty="0"/>
+          </a:p>
+          <a:p>
+            <a:pPr marL="171450" indent="-171450">
+              <a:buFont typeface="Arial" panose="020B0604020202020204" pitchFamily="34" charset="0"/>
+              <a:buChar char="•"/>
+            </a:pPr>
+            <a:r>
+              <a:rPr lang="pt-BR" b="0" dirty="0"/>
+              <a:t>Assim como um bit possui apenas dois estados, uma decisão também possui apenas dois estados.</a:t>
+            </a:r>
+            <a:endParaRPr lang="pt-BR" sz="1200" b="0" kern="1200" dirty="0">
+              <a:solidFill>
+                <a:schemeClr val="tx1"/>
+              </a:solidFill>
+              <a:latin typeface="+mn-lt"/>
+              <a:ea typeface="+mn-ea"/>
+              <a:cs typeface="+mn-cs"/>
+            </a:endParaRPr>
+          </a:p>
+          <a:p>
+            <a:pPr marL="0" indent="0">
+              <a:buFontTx/>
+              <a:buNone/>
+            </a:pPr>
+            <a:endParaRPr lang="pt-BR" b="0" dirty="0"/>
+          </a:p>
+        </p:txBody>
+      </p:sp>
+      <p:sp>
+        <p:nvSpPr>
+          <p:cNvPr id="4" name="Espaço Reservado para Número de Slide 3">
+            <a:extLst>
+              <a:ext uri="{FF2B5EF4-FFF2-40B4-BE49-F238E27FC236}">
+                <a16:creationId xmlns:a16="http://schemas.microsoft.com/office/drawing/2014/main" id="{6A265566-9FA2-2A5E-243A-5DE83AFE53FD}"/>
+              </a:ext>
+            </a:extLst>
+          </p:cNvPr>
+          <p:cNvSpPr>
+            <a:spLocks noGrp="1"/>
+          </p:cNvSpPr>
+          <p:nvPr>
+            <p:ph type="sldNum" sz="quarter" idx="5"/>
+          </p:nvPr>
+        </p:nvSpPr>
+        <p:spPr/>
+        <p:txBody>
+          <a:bodyPr/>
+          <a:lstStyle/>
+          <a:p>
+            <a:fld id="{80F36A49-A1DD-40F8-B8AD-E6F5365256CB}" type="slidenum">
+              <a:rPr lang="pt-BR" smtClean="0"/>
+              <a:t>10</a:t>
+            </a:fld>
+            <a:endParaRPr lang="pt-BR"/>
+          </a:p>
+        </p:txBody>
+      </p:sp>
+    </p:spTree>
+    <p:extLst>
+      <p:ext uri="{BB962C8B-B14F-4D97-AF65-F5344CB8AC3E}">
+        <p14:creationId xmlns:p14="http://schemas.microsoft.com/office/powerpoint/2010/main" val="1855445391"/>
+      </p:ext>
+    </p:extLst>
+  </p:cSld>
+  <p:clrMapOvr>
+    <a:masterClrMapping/>
+  </p:clrMapOvr>
+</p:notes>
+</file>
+
+<file path=ppt/notesSlides/notesSlide11.xml><?xml version="1.0" encoding="utf-8"?>
+<p:notes xmlns:a="http://schemas.openxmlformats.org/drawingml/2006/main" xmlns:r="http://schemas.openxmlformats.org/officeDocument/2006/relationships" xmlns:p="http://schemas.openxmlformats.org/presentationml/2006/main">
+  <p:cSld>
+    <p:spTree>
+      <p:nvGrpSpPr>
+        <p:cNvPr id="1" name="">
+          <a:extLst>
+            <a:ext uri="{FF2B5EF4-FFF2-40B4-BE49-F238E27FC236}">
+              <a16:creationId xmlns:a16="http://schemas.microsoft.com/office/drawing/2014/main" id="{3DA1B3FF-3D03-5C54-3668-21BE057569D8}"/>
+            </a:ext>
+          </a:extLst>
+        </p:cNvPr>
+        <p:cNvGrpSpPr/>
+        <p:nvPr/>
+      </p:nvGrpSpPr>
+      <p:grpSpPr>
+        <a:xfrm>
+          <a:off x="0" y="0"/>
+          <a:ext cx="0" cy="0"/>
+          <a:chOff x="0" y="0"/>
+          <a:chExt cx="0" cy="0"/>
+        </a:xfrm>
+      </p:grpSpPr>
+      <p:sp>
+        <p:nvSpPr>
+          <p:cNvPr id="2" name="Espaço Reservado para Imagem de Slide 1">
+            <a:extLst>
+              <a:ext uri="{FF2B5EF4-FFF2-40B4-BE49-F238E27FC236}">
+                <a16:creationId xmlns:a16="http://schemas.microsoft.com/office/drawing/2014/main" id="{159A9BA9-7A30-9239-9FCC-FE0B9FB7DAB0}"/>
+              </a:ext>
+            </a:extLst>
+          </p:cNvPr>
+          <p:cNvSpPr>
+            <a:spLocks noGrp="1" noRot="1" noChangeAspect="1"/>
+          </p:cNvSpPr>
+          <p:nvPr>
+            <p:ph type="sldImg"/>
+          </p:nvPr>
+        </p:nvSpPr>
+        <p:spPr/>
+        <p:txBody>
+          <a:bodyPr/>
+          <a:lstStyle/>
+          <a:p>
+            <a:endParaRPr lang="pt-BR"/>
+          </a:p>
+        </p:txBody>
+      </p:sp>
+      <p:sp>
+        <p:nvSpPr>
+          <p:cNvPr id="3" name="Espaço Reservado para Anotações 2">
+            <a:extLst>
+              <a:ext uri="{FF2B5EF4-FFF2-40B4-BE49-F238E27FC236}">
+                <a16:creationId xmlns:a16="http://schemas.microsoft.com/office/drawing/2014/main" id="{0A6D955F-ECC4-4A20-3A70-F40DAC02CD38}"/>
+              </a:ext>
+            </a:extLst>
+          </p:cNvPr>
+          <p:cNvSpPr>
+            <a:spLocks noGrp="1"/>
+          </p:cNvSpPr>
+          <p:nvPr>
+            <p:ph type="body" idx="1"/>
+          </p:nvPr>
+        </p:nvSpPr>
+        <p:spPr/>
+        <p:txBody>
+          <a:bodyPr/>
+          <a:lstStyle/>
+          <a:p>
+            <a:pPr marL="0" indent="0">
+              <a:buFontTx/>
+              <a:buNone/>
+            </a:pPr>
+            <a:r>
+              <a:rPr lang="pt-BR" b="1" dirty="0"/>
+              <a:t>Sim e Não também são valores discretos</a:t>
+            </a:r>
+          </a:p>
+          <a:p>
+            <a:pPr marL="171450" indent="-171450">
+              <a:buFont typeface="Arial" panose="020B0604020202020204" pitchFamily="34" charset="0"/>
+              <a:buChar char="•"/>
+            </a:pPr>
+            <a:endParaRPr lang="pt-BR" b="1" dirty="0"/>
+          </a:p>
+          <a:p>
+            <a:pPr marL="171450" indent="-171450">
+              <a:buFont typeface="Arial" panose="020B0604020202020204" pitchFamily="34" charset="0"/>
+              <a:buChar char="•"/>
+            </a:pPr>
+            <a:r>
+              <a:rPr lang="pt-BR" b="0" dirty="0"/>
+              <a:t>Assim como um bit possui apenas dois estados, uma decisão também possui apenas dois estados.</a:t>
+            </a:r>
+            <a:endParaRPr lang="pt-BR" sz="1200" b="0" kern="1200" dirty="0">
+              <a:solidFill>
+                <a:schemeClr val="tx1"/>
+              </a:solidFill>
+              <a:latin typeface="+mn-lt"/>
+              <a:ea typeface="+mn-ea"/>
+              <a:cs typeface="+mn-cs"/>
+            </a:endParaRPr>
+          </a:p>
+          <a:p>
+            <a:pPr marL="0" indent="0">
+              <a:buFontTx/>
+              <a:buNone/>
+            </a:pPr>
+            <a:endParaRPr lang="pt-BR" b="0" dirty="0"/>
+          </a:p>
+        </p:txBody>
+      </p:sp>
+      <p:sp>
+        <p:nvSpPr>
+          <p:cNvPr id="4" name="Espaço Reservado para Número de Slide 3">
+            <a:extLst>
+              <a:ext uri="{FF2B5EF4-FFF2-40B4-BE49-F238E27FC236}">
+                <a16:creationId xmlns:a16="http://schemas.microsoft.com/office/drawing/2014/main" id="{5D54492B-0DB5-FD58-0A56-B28D3551AC34}"/>
+              </a:ext>
+            </a:extLst>
+          </p:cNvPr>
+          <p:cNvSpPr>
+            <a:spLocks noGrp="1"/>
+          </p:cNvSpPr>
+          <p:nvPr>
+            <p:ph type="sldNum" sz="quarter" idx="5"/>
+          </p:nvPr>
+        </p:nvSpPr>
+        <p:spPr/>
+        <p:txBody>
+          <a:bodyPr/>
+          <a:lstStyle/>
+          <a:p>
+            <a:fld id="{80F36A49-A1DD-40F8-B8AD-E6F5365256CB}" type="slidenum">
+              <a:rPr lang="pt-BR" smtClean="0"/>
+              <a:t>11</a:t>
+            </a:fld>
+            <a:endParaRPr lang="pt-BR"/>
+          </a:p>
+        </p:txBody>
+      </p:sp>
+    </p:spTree>
+    <p:extLst>
+      <p:ext uri="{BB962C8B-B14F-4D97-AF65-F5344CB8AC3E}">
+        <p14:creationId xmlns:p14="http://schemas.microsoft.com/office/powerpoint/2010/main" val="3294483339"/>
+      </p:ext>
+    </p:extLst>
+  </p:cSld>
+  <p:clrMapOvr>
+    <a:masterClrMapping/>
+  </p:clrMapOvr>
+</p:notes>
+</file>
+
+<file path=ppt/notesSlides/notesSlide12.xml><?xml version="1.0" encoding="utf-8"?>
+<p:notes xmlns:a="http://schemas.openxmlformats.org/drawingml/2006/main" xmlns:r="http://schemas.openxmlformats.org/officeDocument/2006/relationships" xmlns:p="http://schemas.openxmlformats.org/presentationml/2006/main">
+  <p:cSld>
+    <p:spTree>
+      <p:nvGrpSpPr>
+        <p:cNvPr id="1" name="">
+          <a:extLst>
+            <a:ext uri="{FF2B5EF4-FFF2-40B4-BE49-F238E27FC236}">
+              <a16:creationId xmlns:a16="http://schemas.microsoft.com/office/drawing/2014/main" id="{4B351F41-AB2E-6CA1-1F19-8BD70B57DB57}"/>
+            </a:ext>
+          </a:extLst>
+        </p:cNvPr>
+        <p:cNvGrpSpPr/>
+        <p:nvPr/>
+      </p:nvGrpSpPr>
+      <p:grpSpPr>
+        <a:xfrm>
+          <a:off x="0" y="0"/>
+          <a:ext cx="0" cy="0"/>
+          <a:chOff x="0" y="0"/>
+          <a:chExt cx="0" cy="0"/>
+        </a:xfrm>
+      </p:grpSpPr>
+      <p:sp>
+        <p:nvSpPr>
+          <p:cNvPr id="2" name="Espaço Reservado para Imagem de Slide 1">
+            <a:extLst>
+              <a:ext uri="{FF2B5EF4-FFF2-40B4-BE49-F238E27FC236}">
+                <a16:creationId xmlns:a16="http://schemas.microsoft.com/office/drawing/2014/main" id="{B5424222-7D5A-273D-1002-8A0B58BFF7EC}"/>
+              </a:ext>
+            </a:extLst>
+          </p:cNvPr>
+          <p:cNvSpPr>
+            <a:spLocks noGrp="1" noRot="1" noChangeAspect="1"/>
+          </p:cNvSpPr>
+          <p:nvPr>
+            <p:ph type="sldImg"/>
+          </p:nvPr>
+        </p:nvSpPr>
+        <p:spPr/>
+        <p:txBody>
+          <a:bodyPr/>
+          <a:lstStyle/>
+          <a:p>
+            <a:endParaRPr lang="pt-BR"/>
+          </a:p>
+        </p:txBody>
+      </p:sp>
+      <p:sp>
+        <p:nvSpPr>
+          <p:cNvPr id="3" name="Espaço Reservado para Anotações 2">
+            <a:extLst>
+              <a:ext uri="{FF2B5EF4-FFF2-40B4-BE49-F238E27FC236}">
+                <a16:creationId xmlns:a16="http://schemas.microsoft.com/office/drawing/2014/main" id="{4EC15851-45A3-98B9-7D10-581FBD8F601D}"/>
+              </a:ext>
+            </a:extLst>
+          </p:cNvPr>
+          <p:cNvSpPr>
+            <a:spLocks noGrp="1"/>
+          </p:cNvSpPr>
+          <p:nvPr>
+            <p:ph type="body" idx="1"/>
+          </p:nvPr>
+        </p:nvSpPr>
+        <p:spPr/>
+        <p:txBody>
+          <a:bodyPr/>
+          <a:lstStyle/>
+          <a:p>
+            <a:pPr marL="0" indent="0">
+              <a:buFontTx/>
+              <a:buNone/>
+            </a:pPr>
+            <a:r>
+              <a:rPr lang="pt-BR" b="1" dirty="0"/>
+              <a:t>Sim e Não também são valores discretos</a:t>
+            </a:r>
+          </a:p>
+          <a:p>
+            <a:pPr marL="171450" indent="-171450">
+              <a:buFont typeface="Arial" panose="020B0604020202020204" pitchFamily="34" charset="0"/>
+              <a:buChar char="•"/>
+            </a:pPr>
+            <a:endParaRPr lang="pt-BR" b="1" dirty="0"/>
+          </a:p>
+          <a:p>
+            <a:pPr marL="171450" indent="-171450">
+              <a:buFont typeface="Arial" panose="020B0604020202020204" pitchFamily="34" charset="0"/>
+              <a:buChar char="•"/>
+            </a:pPr>
+            <a:r>
+              <a:rPr lang="pt-BR" b="0" dirty="0"/>
+              <a:t>Assim como um bit possui apenas dois estados, uma decisão também possui apenas dois estados.</a:t>
+            </a:r>
+            <a:endParaRPr lang="pt-BR" sz="1200" b="0" kern="1200" dirty="0">
+              <a:solidFill>
+                <a:schemeClr val="tx1"/>
+              </a:solidFill>
+              <a:latin typeface="+mn-lt"/>
+              <a:ea typeface="+mn-ea"/>
+              <a:cs typeface="+mn-cs"/>
+            </a:endParaRPr>
+          </a:p>
+          <a:p>
+            <a:pPr marL="0" indent="0">
+              <a:buFontTx/>
+              <a:buNone/>
+            </a:pPr>
+            <a:endParaRPr lang="pt-BR" b="0" dirty="0"/>
+          </a:p>
+        </p:txBody>
+      </p:sp>
+      <p:sp>
+        <p:nvSpPr>
+          <p:cNvPr id="4" name="Espaço Reservado para Número de Slide 3">
+            <a:extLst>
+              <a:ext uri="{FF2B5EF4-FFF2-40B4-BE49-F238E27FC236}">
+                <a16:creationId xmlns:a16="http://schemas.microsoft.com/office/drawing/2014/main" id="{20708B34-0FCE-AA6B-DB20-8963E66897E7}"/>
+              </a:ext>
+            </a:extLst>
+          </p:cNvPr>
+          <p:cNvSpPr>
+            <a:spLocks noGrp="1"/>
+          </p:cNvSpPr>
+          <p:nvPr>
+            <p:ph type="sldNum" sz="quarter" idx="5"/>
+          </p:nvPr>
+        </p:nvSpPr>
+        <p:spPr/>
+        <p:txBody>
+          <a:bodyPr/>
+          <a:lstStyle/>
+          <a:p>
+            <a:fld id="{80F36A49-A1DD-40F8-B8AD-E6F5365256CB}" type="slidenum">
+              <a:rPr lang="pt-BR" smtClean="0"/>
+              <a:t>12</a:t>
+            </a:fld>
+            <a:endParaRPr lang="pt-BR"/>
+          </a:p>
+        </p:txBody>
+      </p:sp>
+    </p:spTree>
+    <p:extLst>
+      <p:ext uri="{BB962C8B-B14F-4D97-AF65-F5344CB8AC3E}">
+        <p14:creationId xmlns:p14="http://schemas.microsoft.com/office/powerpoint/2010/main" val="1033960141"/>
+      </p:ext>
+    </p:extLst>
+  </p:cSld>
+  <p:clrMapOvr>
+    <a:masterClrMapping/>
+  </p:clrMapOvr>
+</p:notes>
+</file>
+
+<file path=ppt/notesSlides/notesSlide13.xml><?xml version="1.0" encoding="utf-8"?>
+<p:notes xmlns:a="http://schemas.openxmlformats.org/drawingml/2006/main" xmlns:r="http://schemas.openxmlformats.org/officeDocument/2006/relationships" xmlns:p="http://schemas.openxmlformats.org/presentationml/2006/main">
+  <p:cSld>
+    <p:spTree>
+      <p:nvGrpSpPr>
+        <p:cNvPr id="1" name="">
+          <a:extLst>
+            <a:ext uri="{FF2B5EF4-FFF2-40B4-BE49-F238E27FC236}">
+              <a16:creationId xmlns:a16="http://schemas.microsoft.com/office/drawing/2014/main" id="{5CDBE4D7-2269-30CE-C38B-67B27A9110C0}"/>
+            </a:ext>
+          </a:extLst>
+        </p:cNvPr>
+        <p:cNvGrpSpPr/>
+        <p:nvPr/>
+      </p:nvGrpSpPr>
+      <p:grpSpPr>
+        <a:xfrm>
+          <a:off x="0" y="0"/>
+          <a:ext cx="0" cy="0"/>
+          <a:chOff x="0" y="0"/>
+          <a:chExt cx="0" cy="0"/>
+        </a:xfrm>
+      </p:grpSpPr>
+      <p:sp>
+        <p:nvSpPr>
+          <p:cNvPr id="2" name="Espaço Reservado para Imagem de Slide 1">
+            <a:extLst>
+              <a:ext uri="{FF2B5EF4-FFF2-40B4-BE49-F238E27FC236}">
+                <a16:creationId xmlns:a16="http://schemas.microsoft.com/office/drawing/2014/main" id="{527216D5-5698-B497-C5FA-DC6AF6700B20}"/>
+              </a:ext>
+            </a:extLst>
+          </p:cNvPr>
+          <p:cNvSpPr>
+            <a:spLocks noGrp="1" noRot="1" noChangeAspect="1"/>
+          </p:cNvSpPr>
+          <p:nvPr>
+            <p:ph type="sldImg"/>
+          </p:nvPr>
+        </p:nvSpPr>
+        <p:spPr/>
+        <p:txBody>
+          <a:bodyPr/>
+          <a:lstStyle/>
+          <a:p>
+            <a:endParaRPr lang="pt-BR"/>
+          </a:p>
+        </p:txBody>
+      </p:sp>
+      <p:sp>
+        <p:nvSpPr>
+          <p:cNvPr id="3" name="Espaço Reservado para Anotações 2">
+            <a:extLst>
+              <a:ext uri="{FF2B5EF4-FFF2-40B4-BE49-F238E27FC236}">
+                <a16:creationId xmlns:a16="http://schemas.microsoft.com/office/drawing/2014/main" id="{C7C8B6A9-4013-F8E7-6F88-91E19CEF0058}"/>
+              </a:ext>
+            </a:extLst>
+          </p:cNvPr>
+          <p:cNvSpPr>
+            <a:spLocks noGrp="1"/>
+          </p:cNvSpPr>
+          <p:nvPr>
+            <p:ph type="body" idx="1"/>
+          </p:nvPr>
+        </p:nvSpPr>
+        <p:spPr/>
+        <p:txBody>
+          <a:bodyPr/>
+          <a:lstStyle/>
+          <a:p>
+            <a:pPr marL="0" indent="0">
+              <a:buFontTx/>
+              <a:buNone/>
+            </a:pPr>
+            <a:r>
+              <a:rPr lang="pt-BR" b="1" dirty="0"/>
+              <a:t>Sim e Não também são valores discretos</a:t>
+            </a:r>
+          </a:p>
+          <a:p>
+            <a:pPr marL="171450" indent="-171450">
+              <a:buFont typeface="Arial" panose="020B0604020202020204" pitchFamily="34" charset="0"/>
+              <a:buChar char="•"/>
+            </a:pPr>
+            <a:endParaRPr lang="pt-BR" b="1" dirty="0"/>
+          </a:p>
+          <a:p>
+            <a:pPr marL="171450" indent="-171450">
+              <a:buFont typeface="Arial" panose="020B0604020202020204" pitchFamily="34" charset="0"/>
+              <a:buChar char="•"/>
+            </a:pPr>
+            <a:r>
+              <a:rPr lang="pt-BR" b="0" dirty="0"/>
+              <a:t>Assim como um bit possui apenas dois estados, uma decisão também possui apenas dois estados.</a:t>
+            </a:r>
+            <a:endParaRPr lang="pt-BR" sz="1200" b="0" kern="1200" dirty="0">
+              <a:solidFill>
+                <a:schemeClr val="tx1"/>
+              </a:solidFill>
+              <a:latin typeface="+mn-lt"/>
+              <a:ea typeface="+mn-ea"/>
+              <a:cs typeface="+mn-cs"/>
+            </a:endParaRPr>
+          </a:p>
+          <a:p>
+            <a:pPr marL="0" indent="0">
+              <a:buFontTx/>
+              <a:buNone/>
+            </a:pPr>
+            <a:endParaRPr lang="pt-BR" b="0" dirty="0"/>
+          </a:p>
+        </p:txBody>
+      </p:sp>
+      <p:sp>
+        <p:nvSpPr>
+          <p:cNvPr id="4" name="Espaço Reservado para Número de Slide 3">
+            <a:extLst>
+              <a:ext uri="{FF2B5EF4-FFF2-40B4-BE49-F238E27FC236}">
+                <a16:creationId xmlns:a16="http://schemas.microsoft.com/office/drawing/2014/main" id="{C181B23C-6D2E-1F46-28A3-41318F3AED05}"/>
+              </a:ext>
+            </a:extLst>
+          </p:cNvPr>
+          <p:cNvSpPr>
+            <a:spLocks noGrp="1"/>
+          </p:cNvSpPr>
+          <p:nvPr>
+            <p:ph type="sldNum" sz="quarter" idx="5"/>
+          </p:nvPr>
+        </p:nvSpPr>
+        <p:spPr/>
+        <p:txBody>
+          <a:bodyPr/>
+          <a:lstStyle/>
+          <a:p>
+            <a:fld id="{80F36A49-A1DD-40F8-B8AD-E6F5365256CB}" type="slidenum">
+              <a:rPr lang="pt-BR" smtClean="0"/>
+              <a:t>13</a:t>
+            </a:fld>
+            <a:endParaRPr lang="pt-BR"/>
+          </a:p>
+        </p:txBody>
+      </p:sp>
+    </p:spTree>
+    <p:extLst>
+      <p:ext uri="{BB962C8B-B14F-4D97-AF65-F5344CB8AC3E}">
+        <p14:creationId xmlns:p14="http://schemas.microsoft.com/office/powerpoint/2010/main" val="1962426535"/>
+      </p:ext>
+    </p:extLst>
+  </p:cSld>
+  <p:clrMapOvr>
+    <a:masterClrMapping/>
+  </p:clrMapOvr>
+</p:notes>
+</file>
+
 <file path=ppt/notesSlides/notesSlide2.xml><?xml version="1.0" encoding="utf-8"?>
 <p:notes xmlns:a="http://schemas.openxmlformats.org/drawingml/2006/main" xmlns:r="http://schemas.openxmlformats.org/officeDocument/2006/relationships" xmlns:p="http://schemas.openxmlformats.org/presentationml/2006/main">
   <p:cSld>
@@ -1532,6 +2153,160 @@
 </p:notes>
 </file>
 
+<file path=ppt/notesSlides/notesSlide9.xml><?xml version="1.0" encoding="utf-8"?>
+<p:notes xmlns:a="http://schemas.openxmlformats.org/drawingml/2006/main" xmlns:r="http://schemas.openxmlformats.org/officeDocument/2006/relationships" xmlns:p="http://schemas.openxmlformats.org/presentationml/2006/main">
+  <p:cSld>
+    <p:spTree>
+      <p:nvGrpSpPr>
+        <p:cNvPr id="1" name="">
+          <a:extLst>
+            <a:ext uri="{FF2B5EF4-FFF2-40B4-BE49-F238E27FC236}">
+              <a16:creationId xmlns:a16="http://schemas.microsoft.com/office/drawing/2014/main" id="{12842845-1EAA-7620-1C48-678A2DA624C6}"/>
+            </a:ext>
+          </a:extLst>
+        </p:cNvPr>
+        <p:cNvGrpSpPr/>
+        <p:nvPr/>
+      </p:nvGrpSpPr>
+      <p:grpSpPr>
+        <a:xfrm>
+          <a:off x="0" y="0"/>
+          <a:ext cx="0" cy="0"/>
+          <a:chOff x="0" y="0"/>
+          <a:chExt cx="0" cy="0"/>
+        </a:xfrm>
+      </p:grpSpPr>
+      <p:sp>
+        <p:nvSpPr>
+          <p:cNvPr id="2" name="Espaço Reservado para Imagem de Slide 1">
+            <a:extLst>
+              <a:ext uri="{FF2B5EF4-FFF2-40B4-BE49-F238E27FC236}">
+                <a16:creationId xmlns:a16="http://schemas.microsoft.com/office/drawing/2014/main" id="{93E3DA7A-860E-601E-7822-7EC63E21A273}"/>
+              </a:ext>
+            </a:extLst>
+          </p:cNvPr>
+          <p:cNvSpPr>
+            <a:spLocks noGrp="1" noRot="1" noChangeAspect="1"/>
+          </p:cNvSpPr>
+          <p:nvPr>
+            <p:ph type="sldImg"/>
+          </p:nvPr>
+        </p:nvSpPr>
+        <p:spPr/>
+        <p:txBody>
+          <a:bodyPr/>
+          <a:lstStyle/>
+          <a:p>
+            <a:endParaRPr lang="pt-BR"/>
+          </a:p>
+        </p:txBody>
+      </p:sp>
+      <p:sp>
+        <p:nvSpPr>
+          <p:cNvPr id="3" name="Espaço Reservado para Anotações 2">
+            <a:extLst>
+              <a:ext uri="{FF2B5EF4-FFF2-40B4-BE49-F238E27FC236}">
+                <a16:creationId xmlns:a16="http://schemas.microsoft.com/office/drawing/2014/main" id="{B6CAB569-3428-E878-B867-8D5EDF40B392}"/>
+              </a:ext>
+            </a:extLst>
+          </p:cNvPr>
+          <p:cNvSpPr>
+            <a:spLocks noGrp="1"/>
+          </p:cNvSpPr>
+          <p:nvPr>
+            <p:ph type="body" idx="1"/>
+          </p:nvPr>
+        </p:nvSpPr>
+        <p:spPr/>
+        <p:txBody>
+          <a:bodyPr/>
+          <a:lstStyle/>
+          <a:p>
+            <a:pPr marL="0" indent="0">
+              <a:buFontTx/>
+              <a:buNone/>
+            </a:pPr>
+            <a:r>
+              <a:rPr lang="pt-BR" b="1" dirty="0"/>
+              <a:t>Sim e Não também são valores discretos</a:t>
+            </a:r>
+          </a:p>
+          <a:p>
+            <a:pPr marL="171450" indent="-171450">
+              <a:buFont typeface="Arial" panose="020B0604020202020204" pitchFamily="34" charset="0"/>
+              <a:buChar char="•"/>
+            </a:pPr>
+            <a:endParaRPr lang="pt-BR" b="1" dirty="0"/>
+          </a:p>
+          <a:p>
+            <a:pPr marL="171450" indent="-171450">
+              <a:buFont typeface="Arial" panose="020B0604020202020204" pitchFamily="34" charset="0"/>
+              <a:buChar char="•"/>
+            </a:pPr>
+            <a:r>
+              <a:rPr lang="pt-BR" b="0" dirty="0"/>
+              <a:t>Assim como um bit possui apenas dois estados, uma decisão também possui apenas dois estados.</a:t>
+            </a:r>
+            <a:endParaRPr lang="pt-BR" sz="1200" b="0" kern="1200" dirty="0">
+              <a:solidFill>
+                <a:schemeClr val="tx1"/>
+              </a:solidFill>
+              <a:latin typeface="+mn-lt"/>
+              <a:ea typeface="+mn-ea"/>
+              <a:cs typeface="+mn-cs"/>
+            </a:endParaRPr>
+          </a:p>
+          <a:p>
+            <a:pPr marL="0" indent="0">
+              <a:buFontTx/>
+              <a:buNone/>
+            </a:pPr>
+            <a:endParaRPr lang="pt-BR" b="0" dirty="0"/>
+          </a:p>
+        </p:txBody>
+      </p:sp>
+      <p:sp>
+        <p:nvSpPr>
+          <p:cNvPr id="4" name="Espaço Reservado para Número de Slide 3">
+            <a:extLst>
+              <a:ext uri="{FF2B5EF4-FFF2-40B4-BE49-F238E27FC236}">
+                <a16:creationId xmlns:a16="http://schemas.microsoft.com/office/drawing/2014/main" id="{CA6910D3-E07E-2100-CBD9-2E05D0828E69}"/>
+              </a:ext>
+            </a:extLst>
+          </p:cNvPr>
+          <p:cNvSpPr>
+            <a:spLocks noGrp="1"/>
+          </p:cNvSpPr>
+          <p:nvPr>
+            <p:ph type="sldNum" sz="quarter" idx="5"/>
+          </p:nvPr>
+        </p:nvSpPr>
+        <p:spPr/>
+        <p:txBody>
+          <a:bodyPr/>
+          <a:lstStyle/>
+          <a:p>
+            <a:fld id="{80F36A49-A1DD-40F8-B8AD-E6F5365256CB}" type="slidenum">
+              <a:rPr lang="pt-BR" smtClean="0"/>
+              <a:t>9</a:t>
+            </a:fld>
+            <a:endParaRPr lang="pt-BR"/>
+          </a:p>
+        </p:txBody>
+      </p:sp>
+    </p:spTree>
+    <p:extLst>
+      <p:ext uri="{BB962C8B-B14F-4D97-AF65-F5344CB8AC3E}">
+        <p14:creationId xmlns:p14="http://schemas.microsoft.com/office/powerpoint/2010/main" val="4119455368"/>
+      </p:ext>
+    </p:extLst>
+  </p:cSld>
+  <p:clrMapOvr>
+    <a:masterClrMapping/>
+  </p:clrMapOvr>
+</p:notes>
+</file>
+
 <file path=ppt/slideLayouts/slideLayout1.xml><?xml version="1.0" encoding="utf-8"?>
 <p:sldLayout xmlns:a="http://schemas.openxmlformats.org/drawingml/2006/main" xmlns:r="http://schemas.openxmlformats.org/officeDocument/2006/relationships" xmlns:p="http://schemas.openxmlformats.org/presentationml/2006/main" type="title" preserve="1">
   <p:cSld name="Slide de Título">
@@ -1679,7 +2454,7 @@
           <a:p>
             <a:fld id="{A87E3B6E-8316-4A1C-BADA-DB7F3456EEF1}" type="datetimeFigureOut">
               <a:rPr lang="pt-BR" smtClean="0"/>
-              <a:t>22/08/2026</a:t>
+              <a:t>17/10/2026</a:t>
             </a:fld>
             <a:endParaRPr lang="pt-BR"/>
           </a:p>
@@ -1877,7 +2652,7 @@
           <a:p>
             <a:fld id="{A87E3B6E-8316-4A1C-BADA-DB7F3456EEF1}" type="datetimeFigureOut">
               <a:rPr lang="pt-BR" smtClean="0"/>
-              <a:t>22/08/2026</a:t>
+              <a:t>17/10/2026</a:t>
             </a:fld>
             <a:endParaRPr lang="pt-BR"/>
           </a:p>
@@ -2085,7 +2860,7 @@
           <a:p>
             <a:fld id="{A87E3B6E-8316-4A1C-BADA-DB7F3456EEF1}" type="datetimeFigureOut">
               <a:rPr lang="pt-BR" smtClean="0"/>
-              <a:t>22/08/2026</a:t>
+              <a:t>17/10/2026</a:t>
             </a:fld>
             <a:endParaRPr lang="pt-BR"/>
           </a:p>
@@ -2321,7 +3096,7 @@
           <a:p>
             <a:fld id="{A87E3B6E-8316-4A1C-BADA-DB7F3456EEF1}" type="datetimeFigureOut">
               <a:rPr lang="pt-BR" smtClean="0"/>
-              <a:t>22/08/2026</a:t>
+              <a:t>17/10/2026</a:t>
             </a:fld>
             <a:endParaRPr lang="pt-BR"/>
           </a:p>
@@ -2491,7 +3266,7 @@
           <a:p>
             <a:fld id="{A87E3B6E-8316-4A1C-BADA-DB7F3456EEF1}" type="datetimeFigureOut">
               <a:rPr lang="pt-BR" smtClean="0"/>
-              <a:t>22/08/2026</a:t>
+              <a:t>17/10/2026</a:t>
             </a:fld>
             <a:endParaRPr lang="pt-BR"/>
           </a:p>
@@ -2759,7 +3534,7 @@
           <a:p>
             <a:fld id="{A87E3B6E-8316-4A1C-BADA-DB7F3456EEF1}" type="datetimeFigureOut">
               <a:rPr lang="pt-BR" smtClean="0"/>
-              <a:t>22/08/2026</a:t>
+              <a:t>17/10/2026</a:t>
             </a:fld>
             <a:endParaRPr lang="pt-BR"/>
           </a:p>
@@ -2991,7 +3766,7 @@
           <a:p>
             <a:fld id="{A87E3B6E-8316-4A1C-BADA-DB7F3456EEF1}" type="datetimeFigureOut">
               <a:rPr lang="pt-BR" smtClean="0"/>
-              <a:t>22/08/2026</a:t>
+              <a:t>17/10/2026</a:t>
             </a:fld>
             <a:endParaRPr lang="pt-BR"/>
           </a:p>
@@ -3346,7 +4121,7 @@
           <a:p>
             <a:fld id="{A87E3B6E-8316-4A1C-BADA-DB7F3456EEF1}" type="datetimeFigureOut">
               <a:rPr lang="pt-BR" smtClean="0"/>
-              <a:t>22/08/2026</a:t>
+              <a:t>17/10/2026</a:t>
             </a:fld>
             <a:endParaRPr lang="pt-BR"/>
           </a:p>
@@ -3487,7 +4262,7 @@
           <a:p>
             <a:fld id="{A87E3B6E-8316-4A1C-BADA-DB7F3456EEF1}" type="datetimeFigureOut">
               <a:rPr lang="pt-BR" smtClean="0"/>
-              <a:t>22/08/2026</a:t>
+              <a:t>17/10/2026</a:t>
             </a:fld>
             <a:endParaRPr lang="pt-BR"/>
           </a:p>
@@ -3582,7 +4357,7 @@
           <a:p>
             <a:fld id="{A87E3B6E-8316-4A1C-BADA-DB7F3456EEF1}" type="datetimeFigureOut">
               <a:rPr lang="pt-BR" smtClean="0"/>
-              <a:t>22/08/2026</a:t>
+              <a:t>17/10/2026</a:t>
             </a:fld>
             <a:endParaRPr lang="pt-BR"/>
           </a:p>
@@ -3946,7 +4721,7 @@
           <a:p>
             <a:fld id="{A87E3B6E-8316-4A1C-BADA-DB7F3456EEF1}" type="datetimeFigureOut">
               <a:rPr lang="pt-BR" smtClean="0"/>
-              <a:t>22/08/2026</a:t>
+              <a:t>17/10/2026</a:t>
             </a:fld>
             <a:endParaRPr lang="pt-BR"/>
           </a:p>
@@ -4147,7 +4922,7 @@
           <a:p>
             <a:fld id="{A87E3B6E-8316-4A1C-BADA-DB7F3456EEF1}" type="datetimeFigureOut">
               <a:rPr lang="pt-BR" smtClean="0"/>
-              <a:t>22/08/2026</a:t>
+              <a:t>17/10/2026</a:t>
             </a:fld>
             <a:endParaRPr lang="pt-BR"/>
           </a:p>
@@ -4507,7 +5282,7 @@
           <a:p>
             <a:fld id="{A87E3B6E-8316-4A1C-BADA-DB7F3456EEF1}" type="datetimeFigureOut">
               <a:rPr lang="pt-BR" smtClean="0"/>
-              <a:t>22/08/2026</a:t>
+              <a:t>17/10/2026</a:t>
             </a:fld>
             <a:endParaRPr lang="pt-BR"/>
           </a:p>
@@ -4692,7 +5467,7 @@
           <a:p>
             <a:fld id="{A87E3B6E-8316-4A1C-BADA-DB7F3456EEF1}" type="datetimeFigureOut">
               <a:rPr lang="pt-BR" smtClean="0"/>
-              <a:t>22/08/2026</a:t>
+              <a:t>17/10/2026</a:t>
             </a:fld>
             <a:endParaRPr lang="pt-BR"/>
           </a:p>
@@ -4872,7 +5647,7 @@
           <a:p>
             <a:fld id="{A87E3B6E-8316-4A1C-BADA-DB7F3456EEF1}" type="datetimeFigureOut">
               <a:rPr lang="pt-BR" smtClean="0"/>
-              <a:t>22/08/2026</a:t>
+              <a:t>17/10/2026</a:t>
             </a:fld>
             <a:endParaRPr lang="pt-BR"/>
           </a:p>
@@ -5135,7 +5910,7 @@
           <a:p>
             <a:fld id="{A87E3B6E-8316-4A1C-BADA-DB7F3456EEF1}" type="datetimeFigureOut">
               <a:rPr lang="pt-BR" smtClean="0"/>
-              <a:t>22/08/2026</a:t>
+              <a:t>17/10/2026</a:t>
             </a:fld>
             <a:endParaRPr lang="pt-BR"/>
           </a:p>
@@ -5400,7 +6175,7 @@
           <a:p>
             <a:fld id="{A87E3B6E-8316-4A1C-BADA-DB7F3456EEF1}" type="datetimeFigureOut">
               <a:rPr lang="pt-BR" smtClean="0"/>
-              <a:t>22/08/2026</a:t>
+              <a:t>17/10/2026</a:t>
             </a:fld>
             <a:endParaRPr lang="pt-BR"/>
           </a:p>
@@ -5812,7 +6587,7 @@
           <a:p>
             <a:fld id="{A87E3B6E-8316-4A1C-BADA-DB7F3456EEF1}" type="datetimeFigureOut">
               <a:rPr lang="pt-BR" smtClean="0"/>
-              <a:t>22/08/2026</a:t>
+              <a:t>17/10/2026</a:t>
             </a:fld>
             <a:endParaRPr lang="pt-BR"/>
           </a:p>
@@ -5953,7 +6728,7 @@
           <a:p>
             <a:fld id="{A87E3B6E-8316-4A1C-BADA-DB7F3456EEF1}" type="datetimeFigureOut">
               <a:rPr lang="pt-BR" smtClean="0"/>
-              <a:t>22/08/2026</a:t>
+              <a:t>17/10/2026</a:t>
             </a:fld>
             <a:endParaRPr lang="pt-BR"/>
           </a:p>
@@ -6066,7 +6841,7 @@
           <a:p>
             <a:fld id="{A87E3B6E-8316-4A1C-BADA-DB7F3456EEF1}" type="datetimeFigureOut">
               <a:rPr lang="pt-BR" smtClean="0"/>
-              <a:t>22/08/2026</a:t>
+              <a:t>17/10/2026</a:t>
             </a:fld>
             <a:endParaRPr lang="pt-BR"/>
           </a:p>
@@ -6377,7 +7152,7 @@
           <a:p>
             <a:fld id="{A87E3B6E-8316-4A1C-BADA-DB7F3456EEF1}" type="datetimeFigureOut">
               <a:rPr lang="pt-BR" smtClean="0"/>
-              <a:t>22/08/2026</a:t>
+              <a:t>17/10/2026</a:t>
             </a:fld>
             <a:endParaRPr lang="pt-BR"/>
           </a:p>
@@ -6665,7 +7440,7 @@
           <a:p>
             <a:fld id="{A87E3B6E-8316-4A1C-BADA-DB7F3456EEF1}" type="datetimeFigureOut">
               <a:rPr lang="pt-BR" smtClean="0"/>
-              <a:t>22/08/2026</a:t>
+              <a:t>17/10/2026</a:t>
             </a:fld>
             <a:endParaRPr lang="pt-BR"/>
           </a:p>
@@ -6906,7 +7681,7 @@
           <a:p>
             <a:fld id="{A87E3B6E-8316-4A1C-BADA-DB7F3456EEF1}" type="datetimeFigureOut">
               <a:rPr lang="pt-BR" smtClean="0"/>
-              <a:t>22/08/2026</a:t>
+              <a:t>17/10/2026</a:t>
             </a:fld>
             <a:endParaRPr lang="pt-BR"/>
           </a:p>
@@ -7470,7 +8245,7 @@
           <a:p>
             <a:fld id="{A87E3B6E-8316-4A1C-BADA-DB7F3456EEF1}" type="datetimeFigureOut">
               <a:rPr lang="pt-BR" smtClean="0"/>
-              <a:t>22/08/2026</a:t>
+              <a:t>17/10/2026</a:t>
             </a:fld>
             <a:endParaRPr lang="pt-BR"/>
           </a:p>
@@ -8055,6 +8830,1320 @@
     <p:extLst>
       <p:ext uri="{BB962C8B-B14F-4D97-AF65-F5344CB8AC3E}">
         <p14:creationId xmlns:p14="http://schemas.microsoft.com/office/powerpoint/2010/main" val="521462439"/>
+      </p:ext>
+    </p:extLst>
+  </p:cSld>
+  <p:clrMapOvr>
+    <a:masterClrMapping/>
+  </p:clrMapOvr>
+</p:sld>
+</file>
+
+<file path=ppt/slides/slide10.xml><?xml version="1.0" encoding="utf-8"?>
+<p:sld xmlns:a="http://schemas.openxmlformats.org/drawingml/2006/main" xmlns:r="http://schemas.openxmlformats.org/officeDocument/2006/relationships" xmlns:p="http://schemas.openxmlformats.org/presentationml/2006/main">
+  <p:cSld>
+    <p:spTree>
+      <p:nvGrpSpPr>
+        <p:cNvPr id="1" name="">
+          <a:extLst>
+            <a:ext uri="{FF2B5EF4-FFF2-40B4-BE49-F238E27FC236}">
+              <a16:creationId xmlns:a16="http://schemas.microsoft.com/office/drawing/2014/main" id="{F0FB8370-ACAE-D936-0547-891B2334A7F0}"/>
+            </a:ext>
+          </a:extLst>
+        </p:cNvPr>
+        <p:cNvGrpSpPr/>
+        <p:nvPr/>
+      </p:nvGrpSpPr>
+      <p:grpSpPr>
+        <a:xfrm>
+          <a:off x="0" y="0"/>
+          <a:ext cx="0" cy="0"/>
+          <a:chOff x="0" y="0"/>
+          <a:chExt cx="0" cy="0"/>
+        </a:xfrm>
+      </p:grpSpPr>
+      <p:sp>
+        <p:nvSpPr>
+          <p:cNvPr id="5" name="Retângulo 4">
+            <a:extLst>
+              <a:ext uri="{FF2B5EF4-FFF2-40B4-BE49-F238E27FC236}">
+                <a16:creationId xmlns:a16="http://schemas.microsoft.com/office/drawing/2014/main" id="{FD9D1432-BB39-37E2-57D3-5184F170FA31}"/>
+              </a:ext>
+            </a:extLst>
+          </p:cNvPr>
+          <p:cNvSpPr/>
+          <p:nvPr/>
+        </p:nvSpPr>
+        <p:spPr>
+          <a:xfrm>
+            <a:off x="0" y="-2"/>
+            <a:ext cx="12192000" cy="1325563"/>
+          </a:xfrm>
+          <a:prstGeom prst="rect">
+            <a:avLst/>
+          </a:prstGeom>
+          <a:solidFill>
+            <a:schemeClr val="accent2"/>
+          </a:solidFill>
+          <a:ln>
+            <a:solidFill>
+              <a:srgbClr val="418AB3"/>
+            </a:solidFill>
+          </a:ln>
+        </p:spPr>
+        <p:style>
+          <a:lnRef idx="2">
+            <a:schemeClr val="accent1">
+              <a:shade val="15000"/>
+            </a:schemeClr>
+          </a:lnRef>
+          <a:fillRef idx="1">
+            <a:schemeClr val="accent1"/>
+          </a:fillRef>
+          <a:effectRef idx="0">
+            <a:schemeClr val="accent1"/>
+          </a:effectRef>
+          <a:fontRef idx="minor">
+            <a:schemeClr val="lt1"/>
+          </a:fontRef>
+        </p:style>
+        <p:txBody>
+          <a:bodyPr rtlCol="0" anchor="ctr"/>
+          <a:lstStyle/>
+          <a:p>
+            <a:pPr algn="ctr"/>
+            <a:endParaRPr lang="pt-BR" dirty="0"/>
+          </a:p>
+        </p:txBody>
+      </p:sp>
+      <p:sp>
+        <p:nvSpPr>
+          <p:cNvPr id="2" name="Título 1">
+            <a:extLst>
+              <a:ext uri="{FF2B5EF4-FFF2-40B4-BE49-F238E27FC236}">
+                <a16:creationId xmlns:a16="http://schemas.microsoft.com/office/drawing/2014/main" id="{9FF7744E-FFEE-9560-564B-287D60EDC62E}"/>
+              </a:ext>
+            </a:extLst>
+          </p:cNvPr>
+          <p:cNvSpPr>
+            <a:spLocks noGrp="1"/>
+          </p:cNvSpPr>
+          <p:nvPr>
+            <p:ph type="title"/>
+          </p:nvPr>
+        </p:nvSpPr>
+        <p:spPr>
+          <a:xfrm>
+            <a:off x="0" y="-1"/>
+            <a:ext cx="12192000" cy="1325563"/>
+          </a:xfrm>
+        </p:spPr>
+        <p:txBody>
+          <a:bodyPr/>
+          <a:lstStyle/>
+          <a:p>
+            <a:pPr algn="ctr"/>
+            <a:r>
+              <a:rPr lang="pt-BR" dirty="0">
+                <a:solidFill>
+                  <a:schemeClr val="bg1"/>
+                </a:solidFill>
+              </a:rPr>
+              <a:t>LÓGICA</a:t>
+            </a:r>
+          </a:p>
+        </p:txBody>
+      </p:sp>
+      <p:sp>
+        <p:nvSpPr>
+          <p:cNvPr id="12" name="AutoShape 6" descr="Lógica Proposicional x Lógica de Argumento ⋆ Colaborae">
+            <a:extLst>
+              <a:ext uri="{FF2B5EF4-FFF2-40B4-BE49-F238E27FC236}">
+                <a16:creationId xmlns:a16="http://schemas.microsoft.com/office/drawing/2014/main" id="{44B46C36-4233-0184-116F-40A87A5786B2}"/>
+              </a:ext>
+            </a:extLst>
+          </p:cNvPr>
+          <p:cNvSpPr>
+            <a:spLocks noChangeAspect="1" noChangeArrowheads="1"/>
+          </p:cNvSpPr>
+          <p:nvPr/>
+        </p:nvSpPr>
+        <p:spPr bwMode="auto">
+          <a:xfrm>
+            <a:off x="5943600" y="-1707776"/>
+            <a:ext cx="5289176" cy="5289176"/>
+          </a:xfrm>
+          <a:prstGeom prst="rect">
+            <a:avLst/>
+          </a:prstGeom>
+          <a:noFill/>
+          <a:extLst>
+            <a:ext uri="{909E8E84-426E-40DD-AFC4-6F175D3DCCD1}">
+              <a14:hiddenFill xmlns:a14="http://schemas.microsoft.com/office/drawing/2010/main">
+                <a:solidFill>
+                  <a:srgbClr val="FFFFFF"/>
+                </a:solidFill>
+              </a14:hiddenFill>
+            </a:ext>
+          </a:extLst>
+        </p:spPr>
+        <p:txBody>
+          <a:bodyPr vert="horz" wrap="square" lIns="91440" tIns="45720" rIns="91440" bIns="45720" numCol="1" anchor="t" anchorCtr="0" compatLnSpc="1">
+            <a:prstTxWarp prst="textNoShape">
+              <a:avLst/>
+            </a:prstTxWarp>
+          </a:bodyPr>
+          <a:lstStyle/>
+          <a:p>
+            <a:endParaRPr lang="pt-BR"/>
+          </a:p>
+        </p:txBody>
+      </p:sp>
+      <p:sp>
+        <p:nvSpPr>
+          <p:cNvPr id="6" name="Espaço Reservado para Conteúdo 5">
+            <a:extLst>
+              <a:ext uri="{FF2B5EF4-FFF2-40B4-BE49-F238E27FC236}">
+                <a16:creationId xmlns:a16="http://schemas.microsoft.com/office/drawing/2014/main" id="{814AA13A-B265-2EAA-3448-0B47B490D277}"/>
+              </a:ext>
+            </a:extLst>
+          </p:cNvPr>
+          <p:cNvSpPr>
+            <a:spLocks noGrp="1"/>
+          </p:cNvSpPr>
+          <p:nvPr>
+            <p:ph idx="1"/>
+          </p:nvPr>
+        </p:nvSpPr>
+        <p:spPr>
+          <a:xfrm>
+            <a:off x="544150" y="1687285"/>
+            <a:ext cx="6509794" cy="4811485"/>
+          </a:xfrm>
+        </p:spPr>
+        <p:txBody>
+          <a:bodyPr>
+            <a:normAutofit/>
+          </a:bodyPr>
+          <a:lstStyle/>
+          <a:p>
+            <a:pPr algn="just"/>
+            <a:r>
+              <a:rPr lang="pt-BR" sz="2400" b="1" dirty="0"/>
+              <a:t>Lógica Informal:</a:t>
+            </a:r>
+            <a:endParaRPr lang="pt-BR" sz="2400" dirty="0"/>
+          </a:p>
+          <a:p>
+            <a:pPr marL="0" indent="0" algn="just">
+              <a:buNone/>
+            </a:pPr>
+            <a:endParaRPr lang="pt-BR" sz="2400" dirty="0"/>
+          </a:p>
+          <a:p>
+            <a:pPr marL="0" indent="0" algn="just">
+              <a:buNone/>
+            </a:pPr>
+            <a:r>
+              <a:rPr lang="pt-BR" sz="2400" dirty="0"/>
+              <a:t>Analisa argumentos presentes na linguagem cotidiana, considerando seu significado, contexto e possíveis falácias.</a:t>
+            </a:r>
+          </a:p>
+          <a:p>
+            <a:pPr algn="just"/>
+            <a:endParaRPr lang="pt-BR" sz="2400" dirty="0"/>
+          </a:p>
+          <a:p>
+            <a:pPr algn="just"/>
+            <a:r>
+              <a:rPr lang="pt-BR" sz="2400" b="1" i="1" dirty="0"/>
+              <a:t>Exemplo: </a:t>
+            </a:r>
+          </a:p>
+          <a:p>
+            <a:pPr marL="0" indent="0" algn="just">
+              <a:buNone/>
+            </a:pPr>
+            <a:r>
+              <a:rPr lang="pt-BR" sz="2400" i="1" dirty="0"/>
+              <a:t>"Todos os meus amigos gostam de jogos. Portanto, todas as pessoas gostam de jogos." </a:t>
+            </a:r>
+          </a:p>
+          <a:p>
+            <a:pPr algn="just"/>
+            <a:endParaRPr lang="pt-BR" sz="2400" dirty="0"/>
+          </a:p>
+          <a:p>
+            <a:pPr marL="0" indent="0" algn="just">
+              <a:buNone/>
+            </a:pPr>
+            <a:r>
+              <a:rPr lang="pt-BR" sz="2400" i="1" u="sng" dirty="0"/>
+              <a:t>Essa conclusão é uma generalização indevida.</a:t>
+            </a:r>
+            <a:endParaRPr lang="pt-BR" sz="2200" i="1" u="sng" dirty="0"/>
+          </a:p>
+        </p:txBody>
+      </p:sp>
+      <p:pic>
+        <p:nvPicPr>
+          <p:cNvPr id="18" name="Imagem 17">
+            <a:extLst>
+              <a:ext uri="{FF2B5EF4-FFF2-40B4-BE49-F238E27FC236}">
+                <a16:creationId xmlns:a16="http://schemas.microsoft.com/office/drawing/2014/main" id="{52391143-7C8C-2ACE-4BC8-3DE74CAA15E1}"/>
+              </a:ext>
+            </a:extLst>
+          </p:cNvPr>
+          <p:cNvPicPr>
+            <a:picLocks noChangeAspect="1"/>
+          </p:cNvPicPr>
+          <p:nvPr/>
+        </p:nvPicPr>
+        <p:blipFill>
+          <a:blip r:embed="rId3"/>
+          <a:stretch>
+            <a:fillRect/>
+          </a:stretch>
+        </p:blipFill>
+        <p:spPr>
+          <a:xfrm>
+            <a:off x="7345939" y="4049487"/>
+            <a:ext cx="4846062" cy="2808514"/>
+          </a:xfrm>
+          <a:prstGeom prst="rect">
+            <a:avLst/>
+          </a:prstGeom>
+        </p:spPr>
+      </p:pic>
+    </p:spTree>
+    <p:extLst>
+      <p:ext uri="{BB962C8B-B14F-4D97-AF65-F5344CB8AC3E}">
+        <p14:creationId xmlns:p14="http://schemas.microsoft.com/office/powerpoint/2010/main" val="2222126774"/>
+      </p:ext>
+    </p:extLst>
+  </p:cSld>
+  <p:clrMapOvr>
+    <a:masterClrMapping/>
+  </p:clrMapOvr>
+</p:sld>
+</file>
+
+<file path=ppt/slides/slide11.xml><?xml version="1.0" encoding="utf-8"?>
+<p:sld xmlns:a="http://schemas.openxmlformats.org/drawingml/2006/main" xmlns:r="http://schemas.openxmlformats.org/officeDocument/2006/relationships" xmlns:p="http://schemas.openxmlformats.org/presentationml/2006/main">
+  <p:cSld>
+    <p:spTree>
+      <p:nvGrpSpPr>
+        <p:cNvPr id="1" name="">
+          <a:extLst>
+            <a:ext uri="{FF2B5EF4-FFF2-40B4-BE49-F238E27FC236}">
+              <a16:creationId xmlns:a16="http://schemas.microsoft.com/office/drawing/2014/main" id="{5CD89C08-1974-6B53-179C-75ED2598F72F}"/>
+            </a:ext>
+          </a:extLst>
+        </p:cNvPr>
+        <p:cNvGrpSpPr/>
+        <p:nvPr/>
+      </p:nvGrpSpPr>
+      <p:grpSpPr>
+        <a:xfrm>
+          <a:off x="0" y="0"/>
+          <a:ext cx="0" cy="0"/>
+          <a:chOff x="0" y="0"/>
+          <a:chExt cx="0" cy="0"/>
+        </a:xfrm>
+      </p:grpSpPr>
+      <p:sp>
+        <p:nvSpPr>
+          <p:cNvPr id="5" name="Retângulo 4">
+            <a:extLst>
+              <a:ext uri="{FF2B5EF4-FFF2-40B4-BE49-F238E27FC236}">
+                <a16:creationId xmlns:a16="http://schemas.microsoft.com/office/drawing/2014/main" id="{E7BD3521-5741-5871-702F-70559B847425}"/>
+              </a:ext>
+            </a:extLst>
+          </p:cNvPr>
+          <p:cNvSpPr/>
+          <p:nvPr/>
+        </p:nvSpPr>
+        <p:spPr>
+          <a:xfrm>
+            <a:off x="0" y="-2"/>
+            <a:ext cx="12192000" cy="1325563"/>
+          </a:xfrm>
+          <a:prstGeom prst="rect">
+            <a:avLst/>
+          </a:prstGeom>
+          <a:solidFill>
+            <a:schemeClr val="accent2"/>
+          </a:solidFill>
+          <a:ln>
+            <a:solidFill>
+              <a:srgbClr val="418AB3"/>
+            </a:solidFill>
+          </a:ln>
+        </p:spPr>
+        <p:style>
+          <a:lnRef idx="2">
+            <a:schemeClr val="accent1">
+              <a:shade val="15000"/>
+            </a:schemeClr>
+          </a:lnRef>
+          <a:fillRef idx="1">
+            <a:schemeClr val="accent1"/>
+          </a:fillRef>
+          <a:effectRef idx="0">
+            <a:schemeClr val="accent1"/>
+          </a:effectRef>
+          <a:fontRef idx="minor">
+            <a:schemeClr val="lt1"/>
+          </a:fontRef>
+        </p:style>
+        <p:txBody>
+          <a:bodyPr rtlCol="0" anchor="ctr"/>
+          <a:lstStyle/>
+          <a:p>
+            <a:pPr algn="ctr"/>
+            <a:endParaRPr lang="pt-BR" dirty="0"/>
+          </a:p>
+        </p:txBody>
+      </p:sp>
+      <p:sp>
+        <p:nvSpPr>
+          <p:cNvPr id="2" name="Título 1">
+            <a:extLst>
+              <a:ext uri="{FF2B5EF4-FFF2-40B4-BE49-F238E27FC236}">
+                <a16:creationId xmlns:a16="http://schemas.microsoft.com/office/drawing/2014/main" id="{D1D16117-1FB1-92E2-24E8-5086FF849641}"/>
+              </a:ext>
+            </a:extLst>
+          </p:cNvPr>
+          <p:cNvSpPr>
+            <a:spLocks noGrp="1"/>
+          </p:cNvSpPr>
+          <p:nvPr>
+            <p:ph type="title"/>
+          </p:nvPr>
+        </p:nvSpPr>
+        <p:spPr>
+          <a:xfrm>
+            <a:off x="0" y="-1"/>
+            <a:ext cx="12192000" cy="1325563"/>
+          </a:xfrm>
+        </p:spPr>
+        <p:txBody>
+          <a:bodyPr/>
+          <a:lstStyle/>
+          <a:p>
+            <a:pPr algn="ctr"/>
+            <a:r>
+              <a:rPr lang="pt-BR" dirty="0">
+                <a:solidFill>
+                  <a:schemeClr val="bg1"/>
+                </a:solidFill>
+              </a:rPr>
+              <a:t>LÓGICA</a:t>
+            </a:r>
+          </a:p>
+        </p:txBody>
+      </p:sp>
+      <p:sp>
+        <p:nvSpPr>
+          <p:cNvPr id="12" name="AutoShape 6" descr="Lógica Proposicional x Lógica de Argumento ⋆ Colaborae">
+            <a:extLst>
+              <a:ext uri="{FF2B5EF4-FFF2-40B4-BE49-F238E27FC236}">
+                <a16:creationId xmlns:a16="http://schemas.microsoft.com/office/drawing/2014/main" id="{5910A963-3645-DA7E-A247-3451706513B0}"/>
+              </a:ext>
+            </a:extLst>
+          </p:cNvPr>
+          <p:cNvSpPr>
+            <a:spLocks noChangeAspect="1" noChangeArrowheads="1"/>
+          </p:cNvSpPr>
+          <p:nvPr/>
+        </p:nvSpPr>
+        <p:spPr bwMode="auto">
+          <a:xfrm>
+            <a:off x="5943600" y="-1707776"/>
+            <a:ext cx="5289176" cy="5289176"/>
+          </a:xfrm>
+          <a:prstGeom prst="rect">
+            <a:avLst/>
+          </a:prstGeom>
+          <a:noFill/>
+          <a:extLst>
+            <a:ext uri="{909E8E84-426E-40DD-AFC4-6F175D3DCCD1}">
+              <a14:hiddenFill xmlns:a14="http://schemas.microsoft.com/office/drawing/2010/main">
+                <a:solidFill>
+                  <a:srgbClr val="FFFFFF"/>
+                </a:solidFill>
+              </a14:hiddenFill>
+            </a:ext>
+          </a:extLst>
+        </p:spPr>
+        <p:txBody>
+          <a:bodyPr vert="horz" wrap="square" lIns="91440" tIns="45720" rIns="91440" bIns="45720" numCol="1" anchor="t" anchorCtr="0" compatLnSpc="1">
+            <a:prstTxWarp prst="textNoShape">
+              <a:avLst/>
+            </a:prstTxWarp>
+          </a:bodyPr>
+          <a:lstStyle/>
+          <a:p>
+            <a:endParaRPr lang="pt-BR"/>
+          </a:p>
+        </p:txBody>
+      </p:sp>
+      <p:sp>
+        <p:nvSpPr>
+          <p:cNvPr id="6" name="Espaço Reservado para Conteúdo 5">
+            <a:extLst>
+              <a:ext uri="{FF2B5EF4-FFF2-40B4-BE49-F238E27FC236}">
+                <a16:creationId xmlns:a16="http://schemas.microsoft.com/office/drawing/2014/main" id="{CB535E02-CF2E-E13D-ECE7-B23AAD8F3C6C}"/>
+              </a:ext>
+            </a:extLst>
+          </p:cNvPr>
+          <p:cNvSpPr>
+            <a:spLocks noGrp="1"/>
+          </p:cNvSpPr>
+          <p:nvPr>
+            <p:ph idx="1"/>
+          </p:nvPr>
+        </p:nvSpPr>
+        <p:spPr>
+          <a:xfrm>
+            <a:off x="705500" y="1583748"/>
+            <a:ext cx="10780999" cy="2585481"/>
+          </a:xfrm>
+        </p:spPr>
+        <p:txBody>
+          <a:bodyPr>
+            <a:normAutofit/>
+          </a:bodyPr>
+          <a:lstStyle/>
+          <a:p>
+            <a:pPr marL="0" indent="0" algn="ctr">
+              <a:buNone/>
+            </a:pPr>
+            <a:r>
+              <a:rPr lang="pt-BR" sz="2400" b="1" dirty="0"/>
+              <a:t>Lógica Formal e Matemática:</a:t>
+            </a:r>
+            <a:endParaRPr lang="pt-BR" sz="2400" dirty="0"/>
+          </a:p>
+          <a:p>
+            <a:pPr algn="just"/>
+            <a:r>
+              <a:rPr lang="pt-BR" sz="2400" dirty="0"/>
+              <a:t>Estuda a estrutura dos argumentos por meio de linguagens e regras bem definidas (verificando a validade de um raciocínio independentemente do assunto).</a:t>
+            </a:r>
+          </a:p>
+          <a:p>
+            <a:pPr algn="just"/>
+            <a:endParaRPr lang="pt-BR" sz="2400" dirty="0"/>
+          </a:p>
+          <a:p>
+            <a:pPr algn="just"/>
+            <a:r>
+              <a:rPr lang="pt-BR" sz="2400" dirty="0"/>
+              <a:t>Símbolos, linguagens formais e métodos matemáticos são aplicados para estudar as proposições compostas</a:t>
+            </a:r>
+          </a:p>
+          <a:p>
+            <a:pPr algn="just"/>
+            <a:endParaRPr lang="pt-BR" sz="2400" dirty="0"/>
+          </a:p>
+          <a:p>
+            <a:pPr algn="just"/>
+            <a:endParaRPr lang="pt-BR" sz="2400" dirty="0"/>
+          </a:p>
+          <a:p>
+            <a:pPr algn="just"/>
+            <a:endParaRPr lang="pt-BR" sz="2400" dirty="0"/>
+          </a:p>
+        </p:txBody>
+      </p:sp>
+      <p:pic>
+        <p:nvPicPr>
+          <p:cNvPr id="3" name="Imagem 2">
+            <a:extLst>
+              <a:ext uri="{FF2B5EF4-FFF2-40B4-BE49-F238E27FC236}">
+                <a16:creationId xmlns:a16="http://schemas.microsoft.com/office/drawing/2014/main" id="{D00A3446-C907-8A59-7557-628D3C8906B6}"/>
+              </a:ext>
+            </a:extLst>
+          </p:cNvPr>
+          <p:cNvPicPr>
+            <a:picLocks noChangeAspect="1"/>
+          </p:cNvPicPr>
+          <p:nvPr/>
+        </p:nvPicPr>
+        <p:blipFill>
+          <a:blip r:embed="rId3"/>
+          <a:stretch>
+            <a:fillRect/>
+          </a:stretch>
+        </p:blipFill>
+        <p:spPr>
+          <a:xfrm>
+            <a:off x="7946570" y="4397580"/>
+            <a:ext cx="4245430" cy="2460420"/>
+          </a:xfrm>
+          <a:prstGeom prst="rect">
+            <a:avLst/>
+          </a:prstGeom>
+        </p:spPr>
+      </p:pic>
+      <p:sp>
+        <p:nvSpPr>
+          <p:cNvPr id="4" name="CaixaDeTexto 3">
+            <a:extLst>
+              <a:ext uri="{FF2B5EF4-FFF2-40B4-BE49-F238E27FC236}">
+                <a16:creationId xmlns:a16="http://schemas.microsoft.com/office/drawing/2014/main" id="{621D6388-4D02-FE68-BDC8-2F6D7C339047}"/>
+              </a:ext>
+            </a:extLst>
+          </p:cNvPr>
+          <p:cNvSpPr txBox="1"/>
+          <p:nvPr/>
+        </p:nvSpPr>
+        <p:spPr>
+          <a:xfrm>
+            <a:off x="877497" y="4904138"/>
+            <a:ext cx="6067589" cy="1600438"/>
+          </a:xfrm>
+          <a:prstGeom prst="rect">
+            <a:avLst/>
+          </a:prstGeom>
+          <a:noFill/>
+        </p:spPr>
+        <p:txBody>
+          <a:bodyPr wrap="square" rtlCol="0">
+            <a:spAutoFit/>
+          </a:bodyPr>
+          <a:lstStyle/>
+          <a:p>
+            <a:r>
+              <a:rPr lang="pt-BR" sz="2000" i="1" dirty="0"/>
+              <a:t>Exemplo: </a:t>
+            </a:r>
+          </a:p>
+          <a:p>
+            <a:endParaRPr lang="pt-BR" sz="2000" b="1" i="1" dirty="0"/>
+          </a:p>
+          <a:p>
+            <a:r>
+              <a:rPr lang="pt-BR" sz="2000" b="1" i="1" dirty="0"/>
+              <a:t>“P ^ Q” </a:t>
+            </a:r>
+            <a:r>
+              <a:rPr lang="pt-BR" sz="2000" i="1" dirty="0"/>
+              <a:t>representa que ambas as proposições P e Q são verdadeiros simultaneamente.</a:t>
+            </a:r>
+          </a:p>
+          <a:p>
+            <a:endParaRPr lang="pt-BR" dirty="0"/>
+          </a:p>
+        </p:txBody>
+      </p:sp>
+      <p:pic>
+        <p:nvPicPr>
+          <p:cNvPr id="7" name="Imagem 6">
+            <a:extLst>
+              <a:ext uri="{FF2B5EF4-FFF2-40B4-BE49-F238E27FC236}">
+                <a16:creationId xmlns:a16="http://schemas.microsoft.com/office/drawing/2014/main" id="{0CBBDDD6-3D77-E129-8D07-91366E0949B8}"/>
+              </a:ext>
+            </a:extLst>
+          </p:cNvPr>
+          <p:cNvPicPr>
+            <a:picLocks noChangeAspect="1"/>
+          </p:cNvPicPr>
+          <p:nvPr/>
+        </p:nvPicPr>
+        <p:blipFill>
+          <a:blip r:embed="rId3"/>
+          <a:stretch>
+            <a:fillRect/>
+          </a:stretch>
+        </p:blipFill>
+        <p:spPr>
+          <a:xfrm>
+            <a:off x="7345939" y="4049487"/>
+            <a:ext cx="4846062" cy="2808514"/>
+          </a:xfrm>
+          <a:prstGeom prst="rect">
+            <a:avLst/>
+          </a:prstGeom>
+        </p:spPr>
+      </p:pic>
+    </p:spTree>
+    <p:extLst>
+      <p:ext uri="{BB962C8B-B14F-4D97-AF65-F5344CB8AC3E}">
+        <p14:creationId xmlns:p14="http://schemas.microsoft.com/office/powerpoint/2010/main" val="1425131326"/>
+      </p:ext>
+    </p:extLst>
+  </p:cSld>
+  <p:clrMapOvr>
+    <a:masterClrMapping/>
+  </p:clrMapOvr>
+</p:sld>
+</file>
+
+<file path=ppt/slides/slide12.xml><?xml version="1.0" encoding="utf-8"?>
+<p:sld xmlns:a="http://schemas.openxmlformats.org/drawingml/2006/main" xmlns:r="http://schemas.openxmlformats.org/officeDocument/2006/relationships" xmlns:p="http://schemas.openxmlformats.org/presentationml/2006/main">
+  <p:cSld>
+    <p:spTree>
+      <p:nvGrpSpPr>
+        <p:cNvPr id="1" name="">
+          <a:extLst>
+            <a:ext uri="{FF2B5EF4-FFF2-40B4-BE49-F238E27FC236}">
+              <a16:creationId xmlns:a16="http://schemas.microsoft.com/office/drawing/2014/main" id="{42B10CFD-E24E-C013-A2DF-A7DE2BA5F552}"/>
+            </a:ext>
+          </a:extLst>
+        </p:cNvPr>
+        <p:cNvGrpSpPr/>
+        <p:nvPr/>
+      </p:nvGrpSpPr>
+      <p:grpSpPr>
+        <a:xfrm>
+          <a:off x="0" y="0"/>
+          <a:ext cx="0" cy="0"/>
+          <a:chOff x="0" y="0"/>
+          <a:chExt cx="0" cy="0"/>
+        </a:xfrm>
+      </p:grpSpPr>
+      <p:sp>
+        <p:nvSpPr>
+          <p:cNvPr id="5" name="Retângulo 4">
+            <a:extLst>
+              <a:ext uri="{FF2B5EF4-FFF2-40B4-BE49-F238E27FC236}">
+                <a16:creationId xmlns:a16="http://schemas.microsoft.com/office/drawing/2014/main" id="{C916000B-40A0-95D4-CE3A-A1E6F8E8D029}"/>
+              </a:ext>
+            </a:extLst>
+          </p:cNvPr>
+          <p:cNvSpPr/>
+          <p:nvPr/>
+        </p:nvSpPr>
+        <p:spPr>
+          <a:xfrm>
+            <a:off x="0" y="-2"/>
+            <a:ext cx="12192000" cy="1325563"/>
+          </a:xfrm>
+          <a:prstGeom prst="rect">
+            <a:avLst/>
+          </a:prstGeom>
+          <a:solidFill>
+            <a:schemeClr val="accent2"/>
+          </a:solidFill>
+          <a:ln>
+            <a:solidFill>
+              <a:srgbClr val="418AB3"/>
+            </a:solidFill>
+          </a:ln>
+        </p:spPr>
+        <p:style>
+          <a:lnRef idx="2">
+            <a:schemeClr val="accent1">
+              <a:shade val="15000"/>
+            </a:schemeClr>
+          </a:lnRef>
+          <a:fillRef idx="1">
+            <a:schemeClr val="accent1"/>
+          </a:fillRef>
+          <a:effectRef idx="0">
+            <a:schemeClr val="accent1"/>
+          </a:effectRef>
+          <a:fontRef idx="minor">
+            <a:schemeClr val="lt1"/>
+          </a:fontRef>
+        </p:style>
+        <p:txBody>
+          <a:bodyPr rtlCol="0" anchor="ctr"/>
+          <a:lstStyle/>
+          <a:p>
+            <a:pPr algn="ctr"/>
+            <a:endParaRPr lang="pt-BR" dirty="0"/>
+          </a:p>
+        </p:txBody>
+      </p:sp>
+      <p:sp>
+        <p:nvSpPr>
+          <p:cNvPr id="2" name="Título 1">
+            <a:extLst>
+              <a:ext uri="{FF2B5EF4-FFF2-40B4-BE49-F238E27FC236}">
+                <a16:creationId xmlns:a16="http://schemas.microsoft.com/office/drawing/2014/main" id="{22971EA0-7BF3-3323-B914-990C1BA1040F}"/>
+              </a:ext>
+            </a:extLst>
+          </p:cNvPr>
+          <p:cNvSpPr>
+            <a:spLocks noGrp="1"/>
+          </p:cNvSpPr>
+          <p:nvPr>
+            <p:ph type="title"/>
+          </p:nvPr>
+        </p:nvSpPr>
+        <p:spPr>
+          <a:xfrm>
+            <a:off x="0" y="-1"/>
+            <a:ext cx="12192000" cy="1325563"/>
+          </a:xfrm>
+        </p:spPr>
+        <p:txBody>
+          <a:bodyPr/>
+          <a:lstStyle/>
+          <a:p>
+            <a:pPr algn="ctr"/>
+            <a:r>
+              <a:rPr lang="pt-BR" dirty="0">
+                <a:solidFill>
+                  <a:schemeClr val="bg1"/>
+                </a:solidFill>
+              </a:rPr>
+              <a:t>LÓGICA</a:t>
+            </a:r>
+          </a:p>
+        </p:txBody>
+      </p:sp>
+      <p:sp>
+        <p:nvSpPr>
+          <p:cNvPr id="12" name="AutoShape 6" descr="Lógica Proposicional x Lógica de Argumento ⋆ Colaborae">
+            <a:extLst>
+              <a:ext uri="{FF2B5EF4-FFF2-40B4-BE49-F238E27FC236}">
+                <a16:creationId xmlns:a16="http://schemas.microsoft.com/office/drawing/2014/main" id="{883854C5-7EBA-FF13-C3BD-FE871833E2E3}"/>
+              </a:ext>
+            </a:extLst>
+          </p:cNvPr>
+          <p:cNvSpPr>
+            <a:spLocks noChangeAspect="1" noChangeArrowheads="1"/>
+          </p:cNvSpPr>
+          <p:nvPr/>
+        </p:nvSpPr>
+        <p:spPr bwMode="auto">
+          <a:xfrm>
+            <a:off x="5943600" y="-1707776"/>
+            <a:ext cx="5289176" cy="5289176"/>
+          </a:xfrm>
+          <a:prstGeom prst="rect">
+            <a:avLst/>
+          </a:prstGeom>
+          <a:noFill/>
+          <a:extLst>
+            <a:ext uri="{909E8E84-426E-40DD-AFC4-6F175D3DCCD1}">
+              <a14:hiddenFill xmlns:a14="http://schemas.microsoft.com/office/drawing/2010/main">
+                <a:solidFill>
+                  <a:srgbClr val="FFFFFF"/>
+                </a:solidFill>
+              </a14:hiddenFill>
+            </a:ext>
+          </a:extLst>
+        </p:spPr>
+        <p:txBody>
+          <a:bodyPr vert="horz" wrap="square" lIns="91440" tIns="45720" rIns="91440" bIns="45720" numCol="1" anchor="t" anchorCtr="0" compatLnSpc="1">
+            <a:prstTxWarp prst="textNoShape">
+              <a:avLst/>
+            </a:prstTxWarp>
+          </a:bodyPr>
+          <a:lstStyle/>
+          <a:p>
+            <a:endParaRPr lang="pt-BR"/>
+          </a:p>
+        </p:txBody>
+      </p:sp>
+      <p:sp>
+        <p:nvSpPr>
+          <p:cNvPr id="6" name="Espaço Reservado para Conteúdo 5">
+            <a:extLst>
+              <a:ext uri="{FF2B5EF4-FFF2-40B4-BE49-F238E27FC236}">
+                <a16:creationId xmlns:a16="http://schemas.microsoft.com/office/drawing/2014/main" id="{EC3ECD86-BAA5-28D2-6360-290B651B8BD1}"/>
+              </a:ext>
+            </a:extLst>
+          </p:cNvPr>
+          <p:cNvSpPr>
+            <a:spLocks noGrp="1"/>
+          </p:cNvSpPr>
+          <p:nvPr>
+            <p:ph idx="1"/>
+          </p:nvPr>
+        </p:nvSpPr>
+        <p:spPr>
+          <a:xfrm>
+            <a:off x="705500" y="1583748"/>
+            <a:ext cx="7273729" cy="5100081"/>
+          </a:xfrm>
+        </p:spPr>
+        <p:txBody>
+          <a:bodyPr>
+            <a:normAutofit/>
+          </a:bodyPr>
+          <a:lstStyle/>
+          <a:p>
+            <a:pPr marL="0" indent="0">
+              <a:buNone/>
+            </a:pPr>
+            <a:r>
+              <a:rPr lang="pt-BR" sz="2400" b="1" dirty="0"/>
+              <a:t>Lógica proposicional</a:t>
+            </a:r>
+          </a:p>
+          <a:p>
+            <a:pPr algn="just"/>
+            <a:r>
+              <a:rPr lang="pt-BR" sz="2400" dirty="0"/>
+              <a:t>A lógica proposicional estuda proposições como unidades completas, que podem ser classificadas como verdadeiras ou falsas.</a:t>
+            </a:r>
+          </a:p>
+          <a:p>
+            <a:endParaRPr lang="pt-BR" sz="2400" dirty="0"/>
+          </a:p>
+          <a:p>
+            <a:pPr marL="0" indent="0">
+              <a:buNone/>
+            </a:pPr>
+            <a:r>
+              <a:rPr lang="pt-BR" sz="2400" dirty="0"/>
+              <a:t>Considere:</a:t>
+            </a:r>
+          </a:p>
+          <a:p>
+            <a:pPr lvl="1"/>
+            <a:r>
+              <a:rPr lang="pt-BR" i="1" dirty="0"/>
+              <a:t>P: "Está chovendo."</a:t>
+            </a:r>
+          </a:p>
+          <a:p>
+            <a:pPr lvl="1"/>
+            <a:r>
+              <a:rPr lang="pt-BR" i="1" dirty="0"/>
+              <a:t>Q: "A rua está molhada."</a:t>
+            </a:r>
+          </a:p>
+          <a:p>
+            <a:pPr marL="0" indent="0">
+              <a:buNone/>
+            </a:pPr>
+            <a:endParaRPr lang="pt-BR" sz="2400" dirty="0"/>
+          </a:p>
+          <a:p>
+            <a:pPr marL="0" indent="0">
+              <a:buNone/>
+            </a:pPr>
+            <a:r>
+              <a:rPr lang="pt-BR" sz="2400" dirty="0"/>
+              <a:t>Essas proposições podem ser </a:t>
+            </a:r>
+            <a:r>
+              <a:rPr lang="pt-BR" sz="2400" dirty="0" err="1"/>
+              <a:t>combinaddas</a:t>
+            </a:r>
+            <a:r>
+              <a:rPr lang="pt-BR" sz="2400" dirty="0"/>
+              <a:t> com conectivos lógicos (AND, OR, </a:t>
+            </a:r>
+            <a:r>
+              <a:rPr lang="pt-BR" sz="2400" dirty="0">
+                <a:sym typeface="Wingdings" panose="05000000000000000000" pitchFamily="2" charset="2"/>
+              </a:rPr>
+              <a:t>, </a:t>
+            </a:r>
+            <a:r>
+              <a:rPr lang="pt-BR" sz="2400" dirty="0">
+                <a:latin typeface="Calibri" panose="020F0502020204030204" pitchFamily="34" charset="0"/>
+                <a:ea typeface="Calibri" panose="020F0502020204030204" pitchFamily="34" charset="0"/>
+                <a:cs typeface="Calibri" panose="020F0502020204030204" pitchFamily="34" charset="0"/>
+                <a:sym typeface="Wingdings" panose="05000000000000000000" pitchFamily="2" charset="2"/>
+              </a:rPr>
+              <a:t>↔, NOT</a:t>
+            </a:r>
+            <a:r>
+              <a:rPr lang="pt-BR" sz="2400" dirty="0"/>
+              <a:t>)</a:t>
+            </a:r>
+          </a:p>
+          <a:p>
+            <a:pPr algn="just"/>
+            <a:endParaRPr lang="pt-BR" sz="2400" dirty="0"/>
+          </a:p>
+          <a:p>
+            <a:pPr algn="just"/>
+            <a:endParaRPr lang="pt-BR" sz="2400" dirty="0"/>
+          </a:p>
+          <a:p>
+            <a:pPr algn="just"/>
+            <a:endParaRPr lang="pt-BR" sz="2400" dirty="0"/>
+          </a:p>
+        </p:txBody>
+      </p:sp>
+      <p:pic>
+        <p:nvPicPr>
+          <p:cNvPr id="10" name="Imagem 9">
+            <a:extLst>
+              <a:ext uri="{FF2B5EF4-FFF2-40B4-BE49-F238E27FC236}">
+                <a16:creationId xmlns:a16="http://schemas.microsoft.com/office/drawing/2014/main" id="{97D70AEA-C92C-736D-FF56-001A4B852344}"/>
+              </a:ext>
+            </a:extLst>
+          </p:cNvPr>
+          <p:cNvPicPr>
+            <a:picLocks noChangeAspect="1"/>
+          </p:cNvPicPr>
+          <p:nvPr/>
+        </p:nvPicPr>
+        <p:blipFill>
+          <a:blip r:embed="rId3">
+            <a:extLst>
+              <a:ext uri="{BEBA8EAE-BF5A-486C-A8C5-ECC9F3942E4B}">
+                <a14:imgProps xmlns:a14="http://schemas.microsoft.com/office/drawing/2010/main">
+                  <a14:imgLayer r:embed="rId4">
+                    <a14:imgEffect>
+                      <a14:backgroundRemoval t="0" b="100000" l="0" r="100000">
+                        <a14:foregroundMark x1="27019" y1="38771" x2="71588" y2="76832"/>
+                        <a14:foregroundMark x1="73259" y1="37352" x2="22563" y2="73050"/>
+                        <a14:foregroundMark x1="46240" y1="52719" x2="52089" y2="51537"/>
+                      </a14:backgroundRemoval>
+                    </a14:imgEffect>
+                  </a14:imgLayer>
+                </a14:imgProps>
+              </a:ext>
+            </a:extLst>
+          </a:blip>
+          <a:stretch>
+            <a:fillRect/>
+          </a:stretch>
+        </p:blipFill>
+        <p:spPr>
+          <a:xfrm>
+            <a:off x="8135265" y="1810003"/>
+            <a:ext cx="3915221" cy="4613198"/>
+          </a:xfrm>
+          <a:prstGeom prst="rect">
+            <a:avLst/>
+          </a:prstGeom>
+        </p:spPr>
+      </p:pic>
+    </p:spTree>
+    <p:extLst>
+      <p:ext uri="{BB962C8B-B14F-4D97-AF65-F5344CB8AC3E}">
+        <p14:creationId xmlns:p14="http://schemas.microsoft.com/office/powerpoint/2010/main" val="4127176640"/>
+      </p:ext>
+    </p:extLst>
+  </p:cSld>
+  <p:clrMapOvr>
+    <a:masterClrMapping/>
+  </p:clrMapOvr>
+</p:sld>
+</file>
+
+<file path=ppt/slides/slide13.xml><?xml version="1.0" encoding="utf-8"?>
+<p:sld xmlns:a="http://schemas.openxmlformats.org/drawingml/2006/main" xmlns:r="http://schemas.openxmlformats.org/officeDocument/2006/relationships" xmlns:p="http://schemas.openxmlformats.org/presentationml/2006/main">
+  <p:cSld>
+    <p:spTree>
+      <p:nvGrpSpPr>
+        <p:cNvPr id="1" name="">
+          <a:extLst>
+            <a:ext uri="{FF2B5EF4-FFF2-40B4-BE49-F238E27FC236}">
+              <a16:creationId xmlns:a16="http://schemas.microsoft.com/office/drawing/2014/main" id="{0A25619C-AAE5-60EC-2B25-081F8FF9CE9A}"/>
+            </a:ext>
+          </a:extLst>
+        </p:cNvPr>
+        <p:cNvGrpSpPr/>
+        <p:nvPr/>
+      </p:nvGrpSpPr>
+      <p:grpSpPr>
+        <a:xfrm>
+          <a:off x="0" y="0"/>
+          <a:ext cx="0" cy="0"/>
+          <a:chOff x="0" y="0"/>
+          <a:chExt cx="0" cy="0"/>
+        </a:xfrm>
+      </p:grpSpPr>
+      <p:sp>
+        <p:nvSpPr>
+          <p:cNvPr id="5" name="Retângulo 4">
+            <a:extLst>
+              <a:ext uri="{FF2B5EF4-FFF2-40B4-BE49-F238E27FC236}">
+                <a16:creationId xmlns:a16="http://schemas.microsoft.com/office/drawing/2014/main" id="{2404D206-6B1E-21A6-948F-88A7D2BEA7D9}"/>
+              </a:ext>
+            </a:extLst>
+          </p:cNvPr>
+          <p:cNvSpPr/>
+          <p:nvPr/>
+        </p:nvSpPr>
+        <p:spPr>
+          <a:xfrm>
+            <a:off x="0" y="-2"/>
+            <a:ext cx="12192000" cy="1325563"/>
+          </a:xfrm>
+          <a:prstGeom prst="rect">
+            <a:avLst/>
+          </a:prstGeom>
+          <a:solidFill>
+            <a:schemeClr val="accent2"/>
+          </a:solidFill>
+          <a:ln>
+            <a:solidFill>
+              <a:srgbClr val="418AB3"/>
+            </a:solidFill>
+          </a:ln>
+        </p:spPr>
+        <p:style>
+          <a:lnRef idx="2">
+            <a:schemeClr val="accent1">
+              <a:shade val="15000"/>
+            </a:schemeClr>
+          </a:lnRef>
+          <a:fillRef idx="1">
+            <a:schemeClr val="accent1"/>
+          </a:fillRef>
+          <a:effectRef idx="0">
+            <a:schemeClr val="accent1"/>
+          </a:effectRef>
+          <a:fontRef idx="minor">
+            <a:schemeClr val="lt1"/>
+          </a:fontRef>
+        </p:style>
+        <p:txBody>
+          <a:bodyPr rtlCol="0" anchor="ctr"/>
+          <a:lstStyle/>
+          <a:p>
+            <a:pPr algn="ctr"/>
+            <a:endParaRPr lang="pt-BR" dirty="0"/>
+          </a:p>
+        </p:txBody>
+      </p:sp>
+      <p:sp>
+        <p:nvSpPr>
+          <p:cNvPr id="2" name="Título 1">
+            <a:extLst>
+              <a:ext uri="{FF2B5EF4-FFF2-40B4-BE49-F238E27FC236}">
+                <a16:creationId xmlns:a16="http://schemas.microsoft.com/office/drawing/2014/main" id="{999184AF-1A10-1AEA-1F91-EADC2A823AD8}"/>
+              </a:ext>
+            </a:extLst>
+          </p:cNvPr>
+          <p:cNvSpPr>
+            <a:spLocks noGrp="1"/>
+          </p:cNvSpPr>
+          <p:nvPr>
+            <p:ph type="title"/>
+          </p:nvPr>
+        </p:nvSpPr>
+        <p:spPr>
+          <a:xfrm>
+            <a:off x="0" y="-1"/>
+            <a:ext cx="12192000" cy="1325563"/>
+          </a:xfrm>
+        </p:spPr>
+        <p:txBody>
+          <a:bodyPr/>
+          <a:lstStyle/>
+          <a:p>
+            <a:pPr algn="ctr"/>
+            <a:r>
+              <a:rPr lang="pt-BR" dirty="0">
+                <a:solidFill>
+                  <a:schemeClr val="bg1"/>
+                </a:solidFill>
+              </a:rPr>
+              <a:t>LÓGICA</a:t>
+            </a:r>
+          </a:p>
+        </p:txBody>
+      </p:sp>
+      <p:sp>
+        <p:nvSpPr>
+          <p:cNvPr id="12" name="AutoShape 6" descr="Lógica Proposicional x Lógica de Argumento ⋆ Colaborae">
+            <a:extLst>
+              <a:ext uri="{FF2B5EF4-FFF2-40B4-BE49-F238E27FC236}">
+                <a16:creationId xmlns:a16="http://schemas.microsoft.com/office/drawing/2014/main" id="{E2652363-7E41-EF23-1FBA-6AA55E3DB091}"/>
+              </a:ext>
+            </a:extLst>
+          </p:cNvPr>
+          <p:cNvSpPr>
+            <a:spLocks noChangeAspect="1" noChangeArrowheads="1"/>
+          </p:cNvSpPr>
+          <p:nvPr/>
+        </p:nvSpPr>
+        <p:spPr bwMode="auto">
+          <a:xfrm>
+            <a:off x="5943600" y="-1707776"/>
+            <a:ext cx="5289176" cy="5289176"/>
+          </a:xfrm>
+          <a:prstGeom prst="rect">
+            <a:avLst/>
+          </a:prstGeom>
+          <a:noFill/>
+          <a:extLst>
+            <a:ext uri="{909E8E84-426E-40DD-AFC4-6F175D3DCCD1}">
+              <a14:hiddenFill xmlns:a14="http://schemas.microsoft.com/office/drawing/2010/main">
+                <a:solidFill>
+                  <a:srgbClr val="FFFFFF"/>
+                </a:solidFill>
+              </a14:hiddenFill>
+            </a:ext>
+          </a:extLst>
+        </p:spPr>
+        <p:txBody>
+          <a:bodyPr vert="horz" wrap="square" lIns="91440" tIns="45720" rIns="91440" bIns="45720" numCol="1" anchor="t" anchorCtr="0" compatLnSpc="1">
+            <a:prstTxWarp prst="textNoShape">
+              <a:avLst/>
+            </a:prstTxWarp>
+          </a:bodyPr>
+          <a:lstStyle/>
+          <a:p>
+            <a:endParaRPr lang="pt-BR"/>
+          </a:p>
+        </p:txBody>
+      </p:sp>
+      <p:sp>
+        <p:nvSpPr>
+          <p:cNvPr id="6" name="Espaço Reservado para Conteúdo 5">
+            <a:extLst>
+              <a:ext uri="{FF2B5EF4-FFF2-40B4-BE49-F238E27FC236}">
+                <a16:creationId xmlns:a16="http://schemas.microsoft.com/office/drawing/2014/main" id="{8FD1EDC3-ABA7-5104-68EA-860DD855173B}"/>
+              </a:ext>
+            </a:extLst>
+          </p:cNvPr>
+          <p:cNvSpPr>
+            <a:spLocks noGrp="1"/>
+          </p:cNvSpPr>
+          <p:nvPr>
+            <p:ph idx="1"/>
+          </p:nvPr>
+        </p:nvSpPr>
+        <p:spPr>
+          <a:xfrm>
+            <a:off x="542215" y="1810003"/>
+            <a:ext cx="7273729" cy="4856639"/>
+          </a:xfrm>
+        </p:spPr>
+        <p:txBody>
+          <a:bodyPr>
+            <a:normAutofit/>
+          </a:bodyPr>
+          <a:lstStyle/>
+          <a:p>
+            <a:pPr marL="0" indent="0" algn="just">
+              <a:buNone/>
+            </a:pPr>
+            <a:r>
+              <a:rPr lang="pt-BR" sz="2400" b="1" dirty="0"/>
+              <a:t>Lógica de predicados</a:t>
+            </a:r>
+          </a:p>
+          <a:p>
+            <a:pPr algn="just"/>
+            <a:r>
+              <a:rPr lang="pt-BR" sz="2400" dirty="0"/>
+              <a:t>A lógica de predicados amplia a capacidade de representação da lógica proposicional. </a:t>
+            </a:r>
+          </a:p>
+          <a:p>
+            <a:pPr algn="just"/>
+            <a:endParaRPr lang="pt-BR" sz="2400" dirty="0"/>
+          </a:p>
+          <a:p>
+            <a:pPr algn="just"/>
+            <a:r>
+              <a:rPr lang="pt-BR" sz="2400" dirty="0"/>
+              <a:t>Ela permite expressar propriedades de objetos, relações entre objetos e afirmações sobre conjuntos de indivíduos.</a:t>
+            </a:r>
+          </a:p>
+          <a:p>
+            <a:pPr marL="0" indent="0" algn="just">
+              <a:buNone/>
+            </a:pPr>
+            <a:r>
+              <a:rPr lang="pt-BR" sz="2400" i="1" dirty="0">
+                <a:latin typeface="Times New Roman" panose="02020603050405020304" pitchFamily="18" charset="0"/>
+                <a:ea typeface="Calibri" panose="020F0502020204030204" pitchFamily="34" charset="0"/>
+                <a:cs typeface="Times New Roman" panose="02020603050405020304" pitchFamily="18" charset="0"/>
+              </a:rPr>
+              <a:t>	</a:t>
+            </a:r>
+          </a:p>
+          <a:p>
+            <a:pPr marL="0" indent="0" algn="just">
+              <a:buNone/>
+            </a:pPr>
+            <a:r>
+              <a:rPr lang="pt-BR" sz="2400" i="1" dirty="0">
+                <a:latin typeface="Times New Roman" panose="02020603050405020304" pitchFamily="18" charset="0"/>
+                <a:ea typeface="Calibri" panose="020F0502020204030204" pitchFamily="34" charset="0"/>
+                <a:cs typeface="Times New Roman" panose="02020603050405020304" pitchFamily="18" charset="0"/>
+              </a:rPr>
+              <a:t>Ɐx(Programador(x) </a:t>
+            </a:r>
+            <a:r>
+              <a:rPr lang="pt-BR" sz="2400" i="1" dirty="0">
+                <a:latin typeface="Times New Roman" panose="02020603050405020304" pitchFamily="18" charset="0"/>
+                <a:ea typeface="Calibri" panose="020F0502020204030204" pitchFamily="34" charset="0"/>
+                <a:cs typeface="Times New Roman" panose="02020603050405020304" pitchFamily="18" charset="0"/>
+                <a:sym typeface="Wingdings" panose="05000000000000000000" pitchFamily="2" charset="2"/>
+              </a:rPr>
+              <a:t> </a:t>
+            </a:r>
+            <a:r>
+              <a:rPr lang="pt-BR" sz="2400" i="1" dirty="0" err="1">
+                <a:latin typeface="Times New Roman" panose="02020603050405020304" pitchFamily="18" charset="0"/>
+                <a:ea typeface="Calibri" panose="020F0502020204030204" pitchFamily="34" charset="0"/>
+                <a:cs typeface="Times New Roman" panose="02020603050405020304" pitchFamily="18" charset="0"/>
+                <a:sym typeface="Wingdings" panose="05000000000000000000" pitchFamily="2" charset="2"/>
+              </a:rPr>
+              <a:t>ConheceAlgoritmos</a:t>
+            </a:r>
+            <a:r>
+              <a:rPr lang="pt-BR" sz="2400" i="1" dirty="0">
+                <a:latin typeface="Times New Roman" panose="02020603050405020304" pitchFamily="18" charset="0"/>
+                <a:ea typeface="Calibri" panose="020F0502020204030204" pitchFamily="34" charset="0"/>
+                <a:cs typeface="Times New Roman" panose="02020603050405020304" pitchFamily="18" charset="0"/>
+                <a:sym typeface="Wingdings" panose="05000000000000000000" pitchFamily="2" charset="2"/>
+              </a:rPr>
+              <a:t>(x))</a:t>
+            </a:r>
+          </a:p>
+        </p:txBody>
+      </p:sp>
+      <p:pic>
+        <p:nvPicPr>
+          <p:cNvPr id="4" name="Imagem 3">
+            <a:extLst>
+              <a:ext uri="{FF2B5EF4-FFF2-40B4-BE49-F238E27FC236}">
+                <a16:creationId xmlns:a16="http://schemas.microsoft.com/office/drawing/2014/main" id="{D5B57E60-6D6E-EADD-E421-02C0F1976DCC}"/>
+              </a:ext>
+            </a:extLst>
+          </p:cNvPr>
+          <p:cNvPicPr>
+            <a:picLocks noChangeAspect="1"/>
+          </p:cNvPicPr>
+          <p:nvPr/>
+        </p:nvPicPr>
+        <p:blipFill>
+          <a:blip r:embed="rId3">
+            <a:extLst>
+              <a:ext uri="{BEBA8EAE-BF5A-486C-A8C5-ECC9F3942E4B}">
+                <a14:imgProps xmlns:a14="http://schemas.microsoft.com/office/drawing/2010/main">
+                  <a14:imgLayer r:embed="rId4">
+                    <a14:imgEffect>
+                      <a14:backgroundRemoval t="0" b="100000" l="0" r="100000">
+                        <a14:foregroundMark x1="27019" y1="38771" x2="71588" y2="76832"/>
+                        <a14:foregroundMark x1="73259" y1="37352" x2="22563" y2="73050"/>
+                        <a14:foregroundMark x1="46240" y1="52719" x2="52089" y2="51537"/>
+                      </a14:backgroundRemoval>
+                    </a14:imgEffect>
+                  </a14:imgLayer>
+                </a14:imgProps>
+              </a:ext>
+            </a:extLst>
+          </a:blip>
+          <a:stretch>
+            <a:fillRect/>
+          </a:stretch>
+        </p:blipFill>
+        <p:spPr>
+          <a:xfrm>
+            <a:off x="8135265" y="1810003"/>
+            <a:ext cx="3915221" cy="4613198"/>
+          </a:xfrm>
+          <a:prstGeom prst="rect">
+            <a:avLst/>
+          </a:prstGeom>
+        </p:spPr>
+      </p:pic>
+    </p:spTree>
+    <p:extLst>
+      <p:ext uri="{BB962C8B-B14F-4D97-AF65-F5344CB8AC3E}">
+        <p14:creationId xmlns:p14="http://schemas.microsoft.com/office/powerpoint/2010/main" val="4158647801"/>
       </p:ext>
     </p:extLst>
   </p:cSld>
@@ -10079,8 +12168,8 @@
         </p:nvSpPr>
         <p:spPr>
           <a:xfrm>
-            <a:off x="1993231" y="2069432"/>
-            <a:ext cx="8205537" cy="4238038"/>
+            <a:off x="1197506" y="1972450"/>
+            <a:ext cx="9492187" cy="4238038"/>
           </a:xfrm>
         </p:spPr>
         <p:txBody>
@@ -10150,6 +12239,20 @@
             <a:r>
               <a:rPr lang="pt-BR" sz="2400" b="1" i="1" dirty="0"/>
               <a:t>“Toda decisão vem de uma pergunta”</a:t>
+            </a:r>
+          </a:p>
+          <a:p>
+            <a:r>
+              <a:rPr lang="pt-BR" sz="2400" b="1" i="1" dirty="0"/>
+              <a:t>A área da matemática responsável pelo estudo das decisões é a </a:t>
+            </a:r>
+            <a:r>
+              <a:rPr lang="pt-BR" sz="2400" b="1" i="1" u="sng" dirty="0"/>
+              <a:t>LÓGICA</a:t>
+            </a:r>
+            <a:r>
+              <a:rPr lang="pt-BR" sz="2400" b="1" i="1" dirty="0"/>
+              <a:t> </a:t>
             </a:r>
             <a:endParaRPr lang="pt-BR" sz="2600" b="1" i="1" dirty="0"/>
           </a:p>
@@ -10454,7 +12557,7 @@
         </p:nvCxnSpPr>
         <p:spPr>
           <a:xfrm>
-            <a:off x="5763127" y="3994484"/>
+            <a:off x="5943600" y="3038521"/>
             <a:ext cx="1756610" cy="0"/>
           </a:xfrm>
           <a:prstGeom prst="straightConnector1">
@@ -10493,7 +12596,7 @@
         </p:nvSpPr>
         <p:spPr>
           <a:xfrm>
-            <a:off x="8037096" y="3272594"/>
+            <a:off x="8185130" y="2316631"/>
             <a:ext cx="2562726" cy="1443779"/>
           </a:xfrm>
           <a:prstGeom prst="rect">
@@ -10531,10 +12634,354 @@
           </a:p>
         </p:txBody>
       </p:sp>
+      <p:sp>
+        <p:nvSpPr>
+          <p:cNvPr id="3" name="Retângulo 2">
+            <a:extLst>
+              <a:ext uri="{FF2B5EF4-FFF2-40B4-BE49-F238E27FC236}">
+                <a16:creationId xmlns:a16="http://schemas.microsoft.com/office/drawing/2014/main" id="{99F3E339-0321-E08B-D4F8-B0E900CC078F}"/>
+              </a:ext>
+            </a:extLst>
+          </p:cNvPr>
+          <p:cNvSpPr/>
+          <p:nvPr/>
+        </p:nvSpPr>
+        <p:spPr>
+          <a:xfrm>
+            <a:off x="8185130" y="5011447"/>
+            <a:ext cx="2562726" cy="1443779"/>
+          </a:xfrm>
+          <a:prstGeom prst="rect">
+            <a:avLst/>
+          </a:prstGeom>
+          <a:solidFill>
+            <a:srgbClr val="63A537"/>
+          </a:solidFill>
+        </p:spPr>
+        <p:style>
+          <a:lnRef idx="2">
+            <a:schemeClr val="accent1">
+              <a:shade val="15000"/>
+            </a:schemeClr>
+          </a:lnRef>
+          <a:fillRef idx="1">
+            <a:schemeClr val="accent1"/>
+          </a:fillRef>
+          <a:effectRef idx="0">
+            <a:schemeClr val="accent1"/>
+          </a:effectRef>
+          <a:fontRef idx="minor">
+            <a:schemeClr val="lt1"/>
+          </a:fontRef>
+        </p:style>
+        <p:txBody>
+          <a:bodyPr rtlCol="0" anchor="ctr"/>
+          <a:lstStyle/>
+          <a:p>
+            <a:pPr algn="ctr"/>
+            <a:r>
+              <a:rPr lang="pt-BR" sz="2000" dirty="0"/>
+              <a:t>Os valores utilizados para “responder” tais questões são discretos.</a:t>
+            </a:r>
+          </a:p>
+        </p:txBody>
+      </p:sp>
+      <p:cxnSp>
+        <p:nvCxnSpPr>
+          <p:cNvPr id="7" name="Conector de Seta Reta 6">
+            <a:extLst>
+              <a:ext uri="{FF2B5EF4-FFF2-40B4-BE49-F238E27FC236}">
+                <a16:creationId xmlns:a16="http://schemas.microsoft.com/office/drawing/2014/main" id="{AFAC78E2-702A-1D9E-7CFE-2DB6454EE8A0}"/>
+              </a:ext>
+            </a:extLst>
+          </p:cNvPr>
+          <p:cNvCxnSpPr>
+            <a:cxnSpLocks/>
+          </p:cNvCxnSpPr>
+          <p:nvPr/>
+        </p:nvCxnSpPr>
+        <p:spPr>
+          <a:xfrm>
+            <a:off x="9505139" y="4031673"/>
+            <a:ext cx="0" cy="835648"/>
+          </a:xfrm>
+          <a:prstGeom prst="straightConnector1">
+            <a:avLst/>
+          </a:prstGeom>
+          <a:ln w="57150">
+            <a:tailEnd type="triangle"/>
+          </a:ln>
+        </p:spPr>
+        <p:style>
+          <a:lnRef idx="1">
+            <a:schemeClr val="accent1"/>
+          </a:lnRef>
+          <a:fillRef idx="0">
+            <a:schemeClr val="accent1"/>
+          </a:fillRef>
+          <a:effectRef idx="0">
+            <a:schemeClr val="accent1"/>
+          </a:effectRef>
+          <a:fontRef idx="minor">
+            <a:schemeClr val="tx1"/>
+          </a:fontRef>
+        </p:style>
+      </p:cxnSp>
     </p:spTree>
     <p:extLst>
       <p:ext uri="{BB962C8B-B14F-4D97-AF65-F5344CB8AC3E}">
         <p14:creationId xmlns:p14="http://schemas.microsoft.com/office/powerpoint/2010/main" val="76168048"/>
+      </p:ext>
+    </p:extLst>
+  </p:cSld>
+  <p:clrMapOvr>
+    <a:masterClrMapping/>
+  </p:clrMapOvr>
+</p:sld>
+</file>
+
+<file path=ppt/slides/slide9.xml><?xml version="1.0" encoding="utf-8"?>
+<p:sld xmlns:a="http://schemas.openxmlformats.org/drawingml/2006/main" xmlns:r="http://schemas.openxmlformats.org/officeDocument/2006/relationships" xmlns:p="http://schemas.openxmlformats.org/presentationml/2006/main">
+  <p:cSld>
+    <p:spTree>
+      <p:nvGrpSpPr>
+        <p:cNvPr id="1" name="">
+          <a:extLst>
+            <a:ext uri="{FF2B5EF4-FFF2-40B4-BE49-F238E27FC236}">
+              <a16:creationId xmlns:a16="http://schemas.microsoft.com/office/drawing/2014/main" id="{A4CC0598-3614-0853-75E5-38CDEA4698E5}"/>
+            </a:ext>
+          </a:extLst>
+        </p:cNvPr>
+        <p:cNvGrpSpPr/>
+        <p:nvPr/>
+      </p:nvGrpSpPr>
+      <p:grpSpPr>
+        <a:xfrm>
+          <a:off x="0" y="0"/>
+          <a:ext cx="0" cy="0"/>
+          <a:chOff x="0" y="0"/>
+          <a:chExt cx="0" cy="0"/>
+        </a:xfrm>
+      </p:grpSpPr>
+      <p:sp>
+        <p:nvSpPr>
+          <p:cNvPr id="5" name="Retângulo 4">
+            <a:extLst>
+              <a:ext uri="{FF2B5EF4-FFF2-40B4-BE49-F238E27FC236}">
+                <a16:creationId xmlns:a16="http://schemas.microsoft.com/office/drawing/2014/main" id="{2608F72D-E61B-DCAE-FC66-C91A51327828}"/>
+              </a:ext>
+            </a:extLst>
+          </p:cNvPr>
+          <p:cNvSpPr/>
+          <p:nvPr/>
+        </p:nvSpPr>
+        <p:spPr>
+          <a:xfrm>
+            <a:off x="0" y="-2"/>
+            <a:ext cx="12192000" cy="1325563"/>
+          </a:xfrm>
+          <a:prstGeom prst="rect">
+            <a:avLst/>
+          </a:prstGeom>
+          <a:solidFill>
+            <a:schemeClr val="accent2"/>
+          </a:solidFill>
+          <a:ln>
+            <a:solidFill>
+              <a:srgbClr val="418AB3"/>
+            </a:solidFill>
+          </a:ln>
+        </p:spPr>
+        <p:style>
+          <a:lnRef idx="2">
+            <a:schemeClr val="accent1">
+              <a:shade val="15000"/>
+            </a:schemeClr>
+          </a:lnRef>
+          <a:fillRef idx="1">
+            <a:schemeClr val="accent1"/>
+          </a:fillRef>
+          <a:effectRef idx="0">
+            <a:schemeClr val="accent1"/>
+          </a:effectRef>
+          <a:fontRef idx="minor">
+            <a:schemeClr val="lt1"/>
+          </a:fontRef>
+        </p:style>
+        <p:txBody>
+          <a:bodyPr rtlCol="0" anchor="ctr"/>
+          <a:lstStyle/>
+          <a:p>
+            <a:pPr algn="ctr"/>
+            <a:endParaRPr lang="pt-BR" dirty="0"/>
+          </a:p>
+        </p:txBody>
+      </p:sp>
+      <p:sp>
+        <p:nvSpPr>
+          <p:cNvPr id="2" name="Título 1">
+            <a:extLst>
+              <a:ext uri="{FF2B5EF4-FFF2-40B4-BE49-F238E27FC236}">
+                <a16:creationId xmlns:a16="http://schemas.microsoft.com/office/drawing/2014/main" id="{80C037E6-3ED5-CD4F-4EEC-06851711A30C}"/>
+              </a:ext>
+            </a:extLst>
+          </p:cNvPr>
+          <p:cNvSpPr>
+            <a:spLocks noGrp="1"/>
+          </p:cNvSpPr>
+          <p:nvPr>
+            <p:ph type="title"/>
+          </p:nvPr>
+        </p:nvSpPr>
+        <p:spPr>
+          <a:xfrm>
+            <a:off x="0" y="-1"/>
+            <a:ext cx="12192000" cy="1325563"/>
+          </a:xfrm>
+        </p:spPr>
+        <p:txBody>
+          <a:bodyPr/>
+          <a:lstStyle/>
+          <a:p>
+            <a:pPr algn="ctr"/>
+            <a:r>
+              <a:rPr lang="pt-BR" dirty="0">
+                <a:solidFill>
+                  <a:schemeClr val="bg1"/>
+                </a:solidFill>
+              </a:rPr>
+              <a:t>LÓGICA</a:t>
+            </a:r>
+          </a:p>
+        </p:txBody>
+      </p:sp>
+      <p:sp>
+        <p:nvSpPr>
+          <p:cNvPr id="12" name="AutoShape 6" descr="Lógica Proposicional x Lógica de Argumento ⋆ Colaborae">
+            <a:extLst>
+              <a:ext uri="{FF2B5EF4-FFF2-40B4-BE49-F238E27FC236}">
+                <a16:creationId xmlns:a16="http://schemas.microsoft.com/office/drawing/2014/main" id="{F175A738-9CBE-E608-16A5-A55959636D80}"/>
+              </a:ext>
+            </a:extLst>
+          </p:cNvPr>
+          <p:cNvSpPr>
+            <a:spLocks noChangeAspect="1" noChangeArrowheads="1"/>
+          </p:cNvSpPr>
+          <p:nvPr/>
+        </p:nvSpPr>
+        <p:spPr bwMode="auto">
+          <a:xfrm>
+            <a:off x="5943600" y="-1707776"/>
+            <a:ext cx="5289176" cy="5289176"/>
+          </a:xfrm>
+          <a:prstGeom prst="rect">
+            <a:avLst/>
+          </a:prstGeom>
+          <a:noFill/>
+          <a:extLst>
+            <a:ext uri="{909E8E84-426E-40DD-AFC4-6F175D3DCCD1}">
+              <a14:hiddenFill xmlns:a14="http://schemas.microsoft.com/office/drawing/2010/main">
+                <a:solidFill>
+                  <a:srgbClr val="FFFFFF"/>
+                </a:solidFill>
+              </a14:hiddenFill>
+            </a:ext>
+          </a:extLst>
+        </p:spPr>
+        <p:txBody>
+          <a:bodyPr vert="horz" wrap="square" lIns="91440" tIns="45720" rIns="91440" bIns="45720" numCol="1" anchor="t" anchorCtr="0" compatLnSpc="1">
+            <a:prstTxWarp prst="textNoShape">
+              <a:avLst/>
+            </a:prstTxWarp>
+          </a:bodyPr>
+          <a:lstStyle/>
+          <a:p>
+            <a:endParaRPr lang="pt-BR"/>
+          </a:p>
+        </p:txBody>
+      </p:sp>
+      <p:sp>
+        <p:nvSpPr>
+          <p:cNvPr id="6" name="Espaço Reservado para Conteúdo 5">
+            <a:extLst>
+              <a:ext uri="{FF2B5EF4-FFF2-40B4-BE49-F238E27FC236}">
+                <a16:creationId xmlns:a16="http://schemas.microsoft.com/office/drawing/2014/main" id="{823DC000-964F-75C2-3668-5297046B0587}"/>
+              </a:ext>
+            </a:extLst>
+          </p:cNvPr>
+          <p:cNvSpPr>
+            <a:spLocks noGrp="1"/>
+          </p:cNvSpPr>
+          <p:nvPr>
+            <p:ph idx="1"/>
+          </p:nvPr>
+        </p:nvSpPr>
+        <p:spPr>
+          <a:xfrm>
+            <a:off x="544150" y="2769759"/>
+            <a:ext cx="6085250" cy="2645228"/>
+          </a:xfrm>
+        </p:spPr>
+        <p:txBody>
+          <a:bodyPr>
+            <a:normAutofit/>
+          </a:bodyPr>
+          <a:lstStyle/>
+          <a:p>
+            <a:pPr algn="just"/>
+            <a:r>
+              <a:rPr lang="pt-BR" sz="2400" dirty="0"/>
+              <a:t>A lógica é a área que estuda os princípios do raciocínio válido. </a:t>
+            </a:r>
+          </a:p>
+          <a:p>
+            <a:pPr algn="just"/>
+            <a:endParaRPr lang="pt-BR" sz="2400" dirty="0"/>
+          </a:p>
+          <a:p>
+            <a:pPr algn="just"/>
+            <a:r>
+              <a:rPr lang="pt-BR" sz="2400" dirty="0"/>
+              <a:t>Ela permite analisar argumentos, identificar contradições e verificar a validade de uma conclusão</a:t>
+            </a:r>
+            <a:endParaRPr lang="pt-BR" sz="2200" dirty="0"/>
+          </a:p>
+        </p:txBody>
+      </p:sp>
+      <p:pic>
+        <p:nvPicPr>
+          <p:cNvPr id="14" name="Imagem 13">
+            <a:extLst>
+              <a:ext uri="{FF2B5EF4-FFF2-40B4-BE49-F238E27FC236}">
+                <a16:creationId xmlns:a16="http://schemas.microsoft.com/office/drawing/2014/main" id="{8ED0D16C-6362-EC7F-2F0E-9AD4B9130FE0}"/>
+              </a:ext>
+            </a:extLst>
+          </p:cNvPr>
+          <p:cNvPicPr>
+            <a:picLocks noChangeAspect="1"/>
+          </p:cNvPicPr>
+          <p:nvPr/>
+        </p:nvPicPr>
+        <p:blipFill>
+          <a:blip r:embed="rId3"/>
+          <a:stretch>
+            <a:fillRect/>
+          </a:stretch>
+        </p:blipFill>
+        <p:spPr>
+          <a:xfrm>
+            <a:off x="7075714" y="1586257"/>
+            <a:ext cx="4234679" cy="5012233"/>
+          </a:xfrm>
+          <a:prstGeom prst="rect">
+            <a:avLst/>
+          </a:prstGeom>
+        </p:spPr>
+      </p:pic>
+    </p:spTree>
+    <p:extLst>
+      <p:ext uri="{BB962C8B-B14F-4D97-AF65-F5344CB8AC3E}">
+        <p14:creationId xmlns:p14="http://schemas.microsoft.com/office/powerpoint/2010/main" val="1450969551"/>
       </p:ext>
     </p:extLst>
   </p:cSld>
